--- a/Topic_A/Exam_Practice/AT-A-L10_Speaking_Workshop_Reading_and_Listening_Exam_Skills.pptx
+++ b/Topic_A/Exam_Practice/AT-A-L10_Speaking_Workshop_Reading_and_Listening_Exam_Skills.pptx
@@ -615,7 +615,11 @@
           <a:lstStyle/>
           <a:p>
             <a:r>
-              <a:rPr lang="en-US" dirty="0"/>
+              <a:rPr lang="ar-SA" dirty="0">
+                <a:latin typeface="Amiri" pitchFamily="2" charset="-78"/>
+                <a:ea typeface="Amiri" pitchFamily="2" charset="-78"/>
+                <a:cs typeface="Amiri" pitchFamily="2" charset="-78"/>
+              </a:rPr>
               <a:t>ROLE PLAY C (Develop) — the morning after.
 SET-UP IN THE BREAKOUT ROOM: A = examiner (reads the left column ONLY — the questions, in order), B = candidate (sees the task column; Core may use the help column), C = observer (ticks the feedback checklist). 1 minute preparation, about 3 minutes speaking, 1 minute feedback, then rotate.
 Task ! is the unexpected question: in the exam the candidate has not seen it — the examiner should read it without warning.
@@ -707,7 +711,11 @@
           <a:lstStyle/>
           <a:p>
             <a:r>
-              <a:rPr lang="en-US" dirty="0"/>
+              <a:rPr lang="ar-SA" dirty="0">
+                <a:latin typeface="Amiri" pitchFamily="2" charset="-78"/>
+                <a:ea typeface="Amiri" pitchFamily="2" charset="-78"/>
+                <a:cs typeface="Amiri" pitchFamily="2" charset="-78"/>
+              </a:rPr>
               <a:t>ROLE PLAY D (Stretch) — a youth radio interview.
 SET-UP IN THE BREAKOUT ROOM: A = examiner (reads the left column ONLY — the questions, in order), B = candidate (sees the task column; Core may use the help column), C = observer (ticks the feedback checklist). 1 minute preparation, about 3 minutes speaking, 1 minute feedback, then rotate.
 Task ! is the unexpected question: in the exam the candidate has not seen it — the examiner should read it without warning.
@@ -1243,7 +1251,11 @@
           <a:lstStyle/>
           <a:p>
             <a:r>
-              <a:rPr lang="en-US" dirty="0"/>
+              <a:rPr lang="ar-SA" dirty="0">
+                <a:latin typeface="Amiri" pitchFamily="2" charset="-78"/>
+                <a:ea typeface="Amiri" pitchFamily="2" charset="-78"/>
+                <a:cs typeface="Amiri" pitchFamily="2" charset="-78"/>
+              </a:rPr>
               <a:t>TOPIC CONVERSATION — Core. Examiner asks the questions in order and may add “لِمَاذَا؟ / هَلْ يُمْكِنُ أَنْ تَشْرَحَ أَكْثَرَ؟” to push for more. Candidate aims for one full sentence per question.
 </a:t>
             </a:r>
@@ -1332,7 +1344,11 @@
           <a:lstStyle/>
           <a:p>
             <a:r>
-              <a:rPr lang="en-US" dirty="0"/>
+              <a:rPr lang="ar-SA" dirty="0">
+                <a:latin typeface="Amiri" pitchFamily="2" charset="-78"/>
+                <a:ea typeface="Amiri" pitchFamily="2" charset="-78"/>
+                <a:cs typeface="Amiri" pitchFamily="2" charset="-78"/>
+              </a:rPr>
               <a:t>TOPIC CONVERSATION — Develop. Examiner asks the questions in order and may add “لِمَاذَا؟ / هَلْ يُمْكِنُ أَنْ تَشْرَحَ أَكْثَرَ؟” to push for more. Candidate aims for two or three sentences, mixing time frames.
 </a:t>
             </a:r>
@@ -1421,7 +1437,11 @@
           <a:lstStyle/>
           <a:p>
             <a:r>
-              <a:rPr lang="en-US" dirty="0"/>
+              <a:rPr lang="ar-SA" dirty="0">
+                <a:latin typeface="Amiri" pitchFamily="2" charset="-78"/>
+                <a:ea typeface="Amiri" pitchFamily="2" charset="-78"/>
+                <a:cs typeface="Amiri" pitchFamily="2" charset="-78"/>
+              </a:rPr>
               <a:t>TOPIC CONVERSATION — Stretch. Examiner asks the questions in order and may add “لِمَاذَا؟ / هَلْ يُمْكِنُ أَنْ تَشْرَحَ أَكْثَرَ؟” to push for more. Candidate aims for a developed answer: opinion, comparison, concession and a conditional.
 </a:t>
             </a:r>
@@ -1510,7 +1530,11 @@
           <a:lstStyle/>
           <a:p>
             <a:r>
-              <a:rPr lang="en-US" dirty="0"/>
+              <a:rPr lang="ar-SA" dirty="0">
+                <a:latin typeface="Amiri" pitchFamily="2" charset="-78"/>
+                <a:ea typeface="Amiri" pitchFamily="2" charset="-78"/>
+                <a:cs typeface="Amiri" pitchFamily="2" charset="-78"/>
+              </a:rPr>
               <a:t>WELCOME (1 min) — while students join.
 • Greet each student by name as they arrive: السَّلَامُ عَلَيْكُمْ. Take the register (Pastoral Tracker: attendance 0/1).
 • 2-MINUTE CHECK-IN (SEND training): a private chat to any student who seemed unsettled last lesson — “Are you okay today? 👍 / 👎”.
@@ -2224,7 +2248,11 @@
           <a:lstStyle/>
           <a:p>
             <a:r>
-              <a:rPr lang="en-US" dirty="0"/>
+              <a:rPr lang="ar-SA" dirty="0">
+                <a:latin typeface="Amiri" pitchFamily="2" charset="-78"/>
+                <a:ea typeface="Amiri" pitchFamily="2" charset="-78"/>
+                <a:cs typeface="Amiri" pitchFamily="2" charset="-78"/>
+              </a:rPr>
               <a:t>TEACH (3 min). Role play = precise and complete; conversation = develop. Choral repetition of the repair phrases. To a girl: تُعِيدِي.</a:t>
             </a:r>
             <a:endParaRPr lang="en-US" dirty="0"/>
@@ -2312,7 +2340,11 @@
           <a:lstStyle/>
           <a:p>
             <a:r>
-              <a:rPr lang="en-US" dirty="0"/>
+              <a:rPr lang="ar-SA" dirty="0">
+                <a:latin typeface="Amiri" pitchFamily="2" charset="-78"/>
+                <a:ea typeface="Amiri" pitchFamily="2" charset="-78"/>
+                <a:cs typeface="Amiri" pitchFamily="2" charset="-78"/>
+              </a:rPr>
               <a:t>LANGUAGE BANK (2 min) — the exam rewards three time frames: نَخْرُجُ (present) · قَضَيْنَا (past) · سَنَزُورُ (future). Every topic in A can be fitted into a day out: time, food, transport, health.</a:t>
             </a:r>
             <a:endParaRPr lang="en-US" dirty="0"/>
@@ -2400,7 +2432,11 @@
           <a:lstStyle/>
           <a:p>
             <a:r>
-              <a:rPr lang="en-US" dirty="0"/>
+              <a:rPr lang="ar-SA" dirty="0">
+                <a:latin typeface="Amiri" pitchFamily="2" charset="-78"/>
+                <a:ea typeface="Amiri" pitchFamily="2" charset="-78"/>
+                <a:cs typeface="Amiri" pitchFamily="2" charset="-78"/>
+              </a:rPr>
               <a:t>LANGUAGE BANK (2 min) — suggesting: مَا رَأْيُكَ أَنْ نَذْهَبَ …؟ (an + verb in -a). Feelings agree: كَانَ اليَوْمُ مُمْتِعًا · كَانَتِ الرِّحْلَةُ مُمْتِعَةً.</a:t>
             </a:r>
             <a:endParaRPr lang="en-US" dirty="0"/>
@@ -2576,7 +2612,11 @@
           <a:lstStyle/>
           <a:p>
             <a:r>
-              <a:rPr lang="en-US" dirty="0"/>
+              <a:rPr lang="ar-SA" dirty="0">
+                <a:latin typeface="Amiri" pitchFamily="2" charset="-78"/>
+                <a:ea typeface="Amiri" pitchFamily="2" charset="-78"/>
+                <a:cs typeface="Amiri" pitchFamily="2" charset="-78"/>
+              </a:rPr>
               <a:t>ROLE PLAY A (Core) — planning with a friend.
 SET-UP IN THE BREAKOUT ROOM: A = examiner (reads the left column ONLY — the questions, in order), B = candidate (sees the task column; Core may use the help column), C = observer (ticks the feedback checklist). 1 minute preparation, about 3 minutes speaking, 1 minute feedback, then rotate.
 Task ! is the unexpected question: in the exam the candidate has not seen it — the examiner should read it without warning.
@@ -2668,7 +2708,11 @@
           <a:lstStyle/>
           <a:p>
             <a:r>
-              <a:rPr lang="en-US" dirty="0"/>
+              <a:rPr lang="ar-SA" dirty="0">
+                <a:latin typeface="Amiri" pitchFamily="2" charset="-78"/>
+                <a:ea typeface="Amiri" pitchFamily="2" charset="-78"/>
+                <a:cs typeface="Amiri" pitchFamily="2" charset="-78"/>
+              </a:rPr>
               <a:t>ROLE PLAY B (Core+) — at a tourist office.
 SET-UP IN THE BREAKOUT ROOM: A = examiner (reads the left column ONLY — the questions, in order), B = candidate (sees the task column; Core may use the help column), C = observer (ticks the feedback checklist). 1 minute preparation, about 3 minutes speaking, 1 minute feedback, then rotate.
 Task ! is the unexpected question: in the exam the candidate has not seen it — the examiner should read it without warning.
@@ -3156,6 +3200,7 @@
                   <a:srgbClr val="D4AF37"/>
                 </a:solidFill>
                 <a:latin typeface="Amiri" pitchFamily="2" charset="-78"/>
+                <a:ea typeface="Amiri" pitchFamily="2" charset="-78"/>
                 <a:cs typeface="Amiri" pitchFamily="2" charset="-78"/>
               </a:rPr>
               <a:t>م</a:t>
@@ -3362,6 +3407,7 @@
                   <a:srgbClr val="D4AF37"/>
                 </a:solidFill>
                 <a:latin typeface="Amiri" pitchFamily="2" charset="-78"/>
+                <a:ea typeface="Amiri" pitchFamily="2" charset="-78"/>
                 <a:cs typeface="Amiri" pitchFamily="2" charset="-78"/>
               </a:rPr>
               <a:t>وَرْشَةُ التَّحَدُّثِ — يَوْمٌ فِي الخَارِجِ</a:t>
@@ -3819,6 +3865,7 @@
                   <a:srgbClr val="D4AF37"/>
                 </a:solidFill>
                 <a:latin typeface="Amiri" pitchFamily="2" charset="-78"/>
+                <a:ea typeface="Amiri" pitchFamily="2" charset="-78"/>
                 <a:cs typeface="Amiri" pitchFamily="2" charset="-78"/>
               </a:rPr>
               <a:t>م</a:t>
@@ -4139,6 +4186,7 @@
                   <a:srgbClr val="8A6D1E"/>
                 </a:solidFill>
                 <a:latin typeface="Amiri" pitchFamily="2" charset="-78"/>
+                <a:ea typeface="Amiri" pitchFamily="2" charset="-78"/>
                 <a:cs typeface="Amiri" pitchFamily="2" charset="-78"/>
               </a:rPr>
               <a:t>كَيْفَ كَانَتِ النُّزْهَةُ؟</a:t>
@@ -4419,6 +4467,7 @@
                   <a:srgbClr val="1B3B6F"/>
                 </a:solidFill>
                 <a:latin typeface="Amiri" pitchFamily="2" charset="-78"/>
+                <a:ea typeface="Amiri" pitchFamily="2" charset="-78"/>
                 <a:cs typeface="Amiri" pitchFamily="2" charset="-78"/>
               </a:rPr>
               <a:t>ذَهَبْتُ إِلَى … مَعَ …</a:t>
@@ -4495,6 +4544,7 @@
                   <a:srgbClr val="1B3B6F"/>
                 </a:solidFill>
                 <a:latin typeface="Amiri" pitchFamily="2" charset="-78"/>
+                <a:ea typeface="Amiri" pitchFamily="2" charset="-78"/>
                 <a:cs typeface="Amiri" pitchFamily="2" charset="-78"/>
               </a:rPr>
               <a:t>أَيْنَ ذَهَبْتَ أَمْسِ؟</a:t>
@@ -4598,6 +4648,7 @@
                   <a:srgbClr val="1B3B6F"/>
                 </a:solidFill>
                 <a:latin typeface="Amiri" pitchFamily="2" charset="-78"/>
+                <a:ea typeface="Amiri" pitchFamily="2" charset="-78"/>
                 <a:cs typeface="Amiri" pitchFamily="2" charset="-78"/>
               </a:rPr>
               <a:t>سَبَحْنَا … ثُمَّ …</a:t>
@@ -4674,6 +4725,7 @@
                   <a:srgbClr val="1B3B6F"/>
                 </a:solidFill>
                 <a:latin typeface="Amiri" pitchFamily="2" charset="-78"/>
+                <a:ea typeface="Amiri" pitchFamily="2" charset="-78"/>
                 <a:cs typeface="Amiri" pitchFamily="2" charset="-78"/>
               </a:rPr>
               <a:t>مَاذَا فَعَلْتُمْ هُنَاكَ؟</a:t>
@@ -4777,6 +4829,7 @@
                   <a:srgbClr val="1B3B6F"/>
                 </a:solidFill>
                 <a:latin typeface="Amiri" pitchFamily="2" charset="-78"/>
+                <a:ea typeface="Amiri" pitchFamily="2" charset="-78"/>
                 <a:cs typeface="Amiri" pitchFamily="2" charset="-78"/>
               </a:rPr>
               <a:t>أَكَلْنَا … وَكَانَ …</a:t>
@@ -4853,6 +4906,7 @@
                   <a:srgbClr val="1B3B6F"/>
                 </a:solidFill>
                 <a:latin typeface="Amiri" pitchFamily="2" charset="-78"/>
+                <a:ea typeface="Amiri" pitchFamily="2" charset="-78"/>
                 <a:cs typeface="Amiri" pitchFamily="2" charset="-78"/>
               </a:rPr>
               <a:t>وَمَاذَا أَكَلْتُمْ؟</a:t>
@@ -4956,6 +5010,7 @@
                   <a:srgbClr val="1B3B6F"/>
                 </a:solidFill>
                 <a:latin typeface="Amiri" pitchFamily="2" charset="-78"/>
+                <a:ea typeface="Amiri" pitchFamily="2" charset="-78"/>
                 <a:cs typeface="Amiri" pitchFamily="2" charset="-78"/>
               </a:rPr>
               <a:t>سَلَامَتُكَ! كَيْفَ …؟</a:t>
@@ -5032,6 +5087,7 @@
                   <a:srgbClr val="1B3B6F"/>
                 </a:solidFill>
                 <a:latin typeface="Amiri" pitchFamily="2" charset="-78"/>
+                <a:ea typeface="Amiri" pitchFamily="2" charset="-78"/>
                 <a:cs typeface="Amiri" pitchFamily="2" charset="-78"/>
               </a:rPr>
               <a:t>… أَنَا بَقِيتُ فِي البَيْتِ لِأَنِّي كُنْتُ مَرِيضًا.</a:t>
@@ -5135,6 +5191,7 @@
                   <a:srgbClr val="1B3B6F"/>
                 </a:solidFill>
                 <a:latin typeface="Amiri" pitchFamily="2" charset="-78"/>
+                <a:ea typeface="Amiri" pitchFamily="2" charset="-78"/>
                 <a:cs typeface="Amiri" pitchFamily="2" charset="-78"/>
               </a:rPr>
               <a:t>نَعَمْ، سَنَذْهَبُ … هَلْ تَأْتِي مَعَنَا؟</a:t>
@@ -5211,6 +5268,7 @@
                   <a:srgbClr val="1B3B6F"/>
                 </a:solidFill>
                 <a:latin typeface="Amiri" pitchFamily="2" charset="-78"/>
+                <a:ea typeface="Amiri" pitchFamily="2" charset="-78"/>
                 <a:cs typeface="Amiri" pitchFamily="2" charset="-78"/>
               </a:rPr>
               <a:t>هَلْ سَتَذْهَبُونَ مَرَّةً أُخْرَى؟</a:t>
@@ -5420,6 +5478,7 @@
                   <a:srgbClr val="D4AF37"/>
                 </a:solidFill>
                 <a:latin typeface="Amiri" pitchFamily="2" charset="-78"/>
+                <a:ea typeface="Amiri" pitchFamily="2" charset="-78"/>
                 <a:cs typeface="Amiri" pitchFamily="2" charset="-78"/>
               </a:rPr>
               <a:t>م</a:t>
@@ -5740,6 +5799,7 @@
                   <a:srgbClr val="8A6D1E"/>
                 </a:solidFill>
                 <a:latin typeface="Amiri" pitchFamily="2" charset="-78"/>
+                <a:ea typeface="Amiri" pitchFamily="2" charset="-78"/>
                 <a:cs typeface="Amiri" pitchFamily="2" charset="-78"/>
               </a:rPr>
               <a:t>نِهَايَةُ الأُسْبُوعِ عِنْدَ الشَّبَابِ</a:t>
@@ -6020,6 +6080,7 @@
                   <a:srgbClr val="1B3B6F"/>
                 </a:solidFill>
                 <a:latin typeface="Amiri" pitchFamily="2" charset="-78"/>
+                <a:ea typeface="Amiri" pitchFamily="2" charset="-78"/>
                 <a:cs typeface="Amiri" pitchFamily="2" charset="-78"/>
               </a:rPr>
               <a:t>يَقْضِي كَثِيرٌ مِنْهُمْ … وَهٰذَا …</a:t>
@@ -6096,6 +6157,7 @@
                   <a:srgbClr val="1B3B6F"/>
                 </a:solidFill>
                 <a:latin typeface="Amiri" pitchFamily="2" charset="-78"/>
+                <a:ea typeface="Amiri" pitchFamily="2" charset="-78"/>
                 <a:cs typeface="Amiri" pitchFamily="2" charset="-78"/>
               </a:rPr>
               <a:t>كَيْفَ يَقْضِي الشَّبَابُ عُطْلَةَ نِهَايَةِ الأُسْبُوعِ اليَوْمَ؟</a:t>
@@ -6199,6 +6261,7 @@
                   <a:srgbClr val="1B3B6F"/>
                 </a:solidFill>
                 <a:latin typeface="Amiri" pitchFamily="2" charset="-78"/>
+                <a:ea typeface="Amiri" pitchFamily="2" charset="-78"/>
                 <a:cs typeface="Amiri" pitchFamily="2" charset="-78"/>
               </a:rPr>
               <a:t>كَانَ … أَمَّا اليَوْمَ فَيُفَضِّلُونَ …</a:t>
@@ -6275,6 +6338,7 @@
                   <a:srgbClr val="1B3B6F"/>
                 </a:solidFill>
                 <a:latin typeface="Amiri" pitchFamily="2" charset="-78"/>
+                <a:ea typeface="Amiri" pitchFamily="2" charset="-78"/>
                 <a:cs typeface="Amiri" pitchFamily="2" charset="-78"/>
               </a:rPr>
               <a:t>وَكَيْفَ كَانَ الأَمْرُ فِي المَاضِي؟</a:t>
@@ -6378,6 +6442,7 @@
                   <a:srgbClr val="1B3B6F"/>
                 </a:solidFill>
                 <a:latin typeface="Amiri" pitchFamily="2" charset="-78"/>
+                <a:ea typeface="Amiri" pitchFamily="2" charset="-78"/>
                 <a:cs typeface="Amiri" pitchFamily="2" charset="-78"/>
               </a:rPr>
               <a:t>ذَهَبْنَا … وَفَجْأَةً … فَاخْتَبَأْنَا …</a:t>
@@ -6454,6 +6519,7 @@
                   <a:srgbClr val="1B3B6F"/>
                 </a:solidFill>
                 <a:latin typeface="Amiri" pitchFamily="2" charset="-78"/>
+                <a:ea typeface="Amiri" pitchFamily="2" charset="-78"/>
                 <a:cs typeface="Amiri" pitchFamily="2" charset="-78"/>
               </a:rPr>
               <a:t>صِفْ لَنَا نُزْهَةً لَا تَنْسَاهَا.</a:t>
@@ -6557,6 +6623,7 @@
                   <a:srgbClr val="1B3B6F"/>
                 </a:solidFill>
                 <a:latin typeface="Amiri" pitchFamily="2" charset="-78"/>
+                <a:ea typeface="Amiri" pitchFamily="2" charset="-78"/>
                 <a:cs typeface="Amiri" pitchFamily="2" charset="-78"/>
               </a:rPr>
               <a:t>صَحِيحٌ أَنَّ … غَيْرَ أَنَّ …</a:t>
@@ -6633,6 +6700,7 @@
                   <a:srgbClr val="1B3B6F"/>
                 </a:solidFill>
                 <a:latin typeface="Amiri" pitchFamily="2" charset="-78"/>
+                <a:ea typeface="Amiri" pitchFamily="2" charset="-78"/>
                 <a:cs typeface="Amiri" pitchFamily="2" charset="-78"/>
               </a:rPr>
               <a:t>يَقُولُ البَعْضُ إِنَّ النُّزُهَاتِ غَالِيَةٌ جِدًّا.</a:t>
@@ -6736,6 +6804,7 @@
                   <a:srgbClr val="1B3B6F"/>
                 </a:solidFill>
                 <a:latin typeface="Amiri" pitchFamily="2" charset="-78"/>
+                <a:ea typeface="Amiri" pitchFamily="2" charset="-78"/>
                 <a:cs typeface="Amiri" pitchFamily="2" charset="-78"/>
               </a:rPr>
               <a:t>لَوْ كُنْتُ أَسْتَطِيعُ …، لَذَهَبْتُ …</a:t>
@@ -6812,6 +6881,7 @@
                   <a:srgbClr val="1B3B6F"/>
                 </a:solidFill>
                 <a:latin typeface="Amiri" pitchFamily="2" charset="-78"/>
+                <a:ea typeface="Amiri" pitchFamily="2" charset="-78"/>
                 <a:cs typeface="Amiri" pitchFamily="2" charset="-78"/>
               </a:rPr>
               <a:t>لَوْ كُنْتَ تَسْتَطِيعُ أَنْ تَذْهَبَ إِلَى أَيِّ مَكَانٍ غَدًا، أَيْنَ تَذْهَبُ؟</a:t>
@@ -7021,6 +7091,7 @@
                   <a:srgbClr val="D4AF37"/>
                 </a:solidFill>
                 <a:latin typeface="Amiri" pitchFamily="2" charset="-78"/>
+                <a:ea typeface="Amiri" pitchFamily="2" charset="-78"/>
                 <a:cs typeface="Amiri" pitchFamily="2" charset="-78"/>
               </a:rPr>
               <a:t>م</a:t>
@@ -7341,6 +7412,7 @@
                   <a:srgbClr val="8A6D1E"/>
                 </a:solidFill>
                 <a:latin typeface="Amiri" pitchFamily="2" charset="-78"/>
+                <a:ea typeface="Amiri" pitchFamily="2" charset="-78"/>
                 <a:cs typeface="Amiri" pitchFamily="2" charset="-78"/>
               </a:rPr>
               <a:t>وَرَقَةُ المُلَاحِظِ</a:t>
@@ -8811,6 +8883,7 @@
                   <a:srgbClr val="D4AF37"/>
                 </a:solidFill>
                 <a:latin typeface="Amiri" pitchFamily="2" charset="-78"/>
+                <a:ea typeface="Amiri" pitchFamily="2" charset="-78"/>
                 <a:cs typeface="Amiri" pitchFamily="2" charset="-78"/>
               </a:rPr>
               <a:t>م</a:t>
@@ -9131,6 +9204,7 @@
                   <a:srgbClr val="8A6D1E"/>
                 </a:solidFill>
                 <a:latin typeface="Amiri" pitchFamily="2" charset="-78"/>
+                <a:ea typeface="Amiri" pitchFamily="2" charset="-78"/>
                 <a:cs typeface="Amiri" pitchFamily="2" charset="-78"/>
               </a:rPr>
               <a:t>نَمُوذَجُ الإِجَابَةِ</a:t>
@@ -9373,6 +9447,7 @@
                   <a:srgbClr val="1B3B6F"/>
                 </a:solidFill>
                 <a:latin typeface="Amiri" pitchFamily="2" charset="-78"/>
+                <a:ea typeface="Amiri" pitchFamily="2" charset="-78"/>
                 <a:cs typeface="Amiri" pitchFamily="2" charset="-78"/>
               </a:rPr>
               <a:t>مَا رَأْيُكَ أَنْ نَذْهَبَ إِلَى الحَدِيقَةِ الكَبِيرَةِ؟</a:t>
@@ -9449,6 +9524,7 @@
                   <a:srgbClr val="1B3B6F"/>
                 </a:solidFill>
                 <a:latin typeface="Amiri" pitchFamily="2" charset="-78"/>
+                <a:ea typeface="Amiri" pitchFamily="2" charset="-78"/>
                 <a:cs typeface="Amiri" pitchFamily="2" charset="-78"/>
               </a:rPr>
               <a:t>مَاذَا نَفْعَلُ يَوْمَ السَّبْتِ؟</a:t>
@@ -9552,6 +9628,7 @@
                   <a:srgbClr val="1B3B6F"/>
                 </a:solidFill>
                 <a:latin typeface="Amiri" pitchFamily="2" charset="-78"/>
+                <a:ea typeface="Amiri" pitchFamily="2" charset="-78"/>
                 <a:cs typeface="Amiri" pitchFamily="2" charset="-78"/>
               </a:rPr>
               <a:t>نَلْتَقِي فِي السَّاعَةِ العَاشِرَةِ أَمَامَ المَكْتَبَةِ.</a:t>
@@ -9628,6 +9705,7 @@
                   <a:srgbClr val="1B3B6F"/>
                 </a:solidFill>
                 <a:latin typeface="Amiri" pitchFamily="2" charset="-78"/>
+                <a:ea typeface="Amiri" pitchFamily="2" charset="-78"/>
                 <a:cs typeface="Amiri" pitchFamily="2" charset="-78"/>
               </a:rPr>
               <a:t>فِكْرَةٌ رَائِعَةٌ! مَتَى نَلْتَقِي؟</a:t>
@@ -9731,6 +9809,7 @@
                   <a:srgbClr val="1B3B6F"/>
                 </a:solidFill>
                 <a:latin typeface="Amiri" pitchFamily="2" charset="-78"/>
+                <a:ea typeface="Amiri" pitchFamily="2" charset="-78"/>
                 <a:cs typeface="Amiri" pitchFamily="2" charset="-78"/>
               </a:rPr>
               <a:t>نَذْهَبُ بِالحَافِلَةِ، لِأَنَّهَا رَخِيصَةٌ وَسَرِيعَةٌ.</a:t>
@@ -9807,6 +9886,7 @@
                   <a:srgbClr val="1B3B6F"/>
                 </a:solidFill>
                 <a:latin typeface="Amiri" pitchFamily="2" charset="-78"/>
+                <a:ea typeface="Amiri" pitchFamily="2" charset="-78"/>
                 <a:cs typeface="Amiri" pitchFamily="2" charset="-78"/>
               </a:rPr>
               <a:t>كَيْفَ نَذْهَبُ؟</a:t>
@@ -9910,6 +9990,7 @@
                   <a:srgbClr val="1B3B6F"/>
                 </a:solidFill>
                 <a:latin typeface="Amiri" pitchFamily="2" charset="-78"/>
+                <a:ea typeface="Amiri" pitchFamily="2" charset="-78"/>
                 <a:cs typeface="Amiri" pitchFamily="2" charset="-78"/>
               </a:rPr>
               <a:t>سَأُحْضِرُ السَّنْدَوِيشَاتِ وَالفَوَاكِهَ وَالمَاءَ.</a:t>
@@ -9986,6 +10067,7 @@
                   <a:srgbClr val="1B3B6F"/>
                 </a:solidFill>
                 <a:latin typeface="Amiri" pitchFamily="2" charset="-78"/>
+                <a:ea typeface="Amiri" pitchFamily="2" charset="-78"/>
                 <a:cs typeface="Amiri" pitchFamily="2" charset="-78"/>
               </a:rPr>
               <a:t>وَمَاذَا نَأْكُلُ؟</a:t>
@@ -10089,6 +10171,7 @@
                   <a:srgbClr val="1B3B6F"/>
                 </a:solidFill>
                 <a:latin typeface="Amiri" pitchFamily="2" charset="-78"/>
+                <a:ea typeface="Amiri" pitchFamily="2" charset="-78"/>
                 <a:cs typeface="Amiri" pitchFamily="2" charset="-78"/>
               </a:rPr>
               <a:t>إِذَا كَانَ الجَوُّ مُمْطِرًا، نَذْهَبُ إِلَى المُتْحَفِ بَدَلًا مِنَ الحَدِيقَةِ.</a:t>
@@ -10165,6 +10248,7 @@
                   <a:srgbClr val="1B3B6F"/>
                 </a:solidFill>
                 <a:latin typeface="Amiri" pitchFamily="2" charset="-78"/>
+                <a:ea typeface="Amiri" pitchFamily="2" charset="-78"/>
                 <a:cs typeface="Amiri" pitchFamily="2" charset="-78"/>
               </a:rPr>
               <a:t>وَإِذَا كَانَ الجَوُّ مُمْطِرًا؟</a:t>
@@ -10374,6 +10458,7 @@
                   <a:srgbClr val="D4AF37"/>
                 </a:solidFill>
                 <a:latin typeface="Amiri" pitchFamily="2" charset="-78"/>
+                <a:ea typeface="Amiri" pitchFamily="2" charset="-78"/>
                 <a:cs typeface="Amiri" pitchFamily="2" charset="-78"/>
               </a:rPr>
               <a:t>م</a:t>
@@ -10694,6 +10779,7 @@
                   <a:srgbClr val="8A6D1E"/>
                 </a:solidFill>
                 <a:latin typeface="Amiri" pitchFamily="2" charset="-78"/>
+                <a:ea typeface="Amiri" pitchFamily="2" charset="-78"/>
                 <a:cs typeface="Amiri" pitchFamily="2" charset="-78"/>
               </a:rPr>
               <a:t>نَمُوذَجُ الإِجَابَةِ</a:t>
@@ -10936,6 +11022,7 @@
                   <a:srgbClr val="1B3B6F"/>
                 </a:solidFill>
                 <a:latin typeface="Amiri" pitchFamily="2" charset="-78"/>
+                <a:ea typeface="Amiri" pitchFamily="2" charset="-78"/>
                 <a:cs typeface="Amiri" pitchFamily="2" charset="-78"/>
               </a:rPr>
               <a:t>مَرْحَبًا، مَاذَا يُمْكِنُ أَنْ نَفْعَلَ فِي المَدِينَةِ اليَوْمَ؟</a:t>
@@ -11012,6 +11099,7 @@
                   <a:srgbClr val="1B3B6F"/>
                 </a:solidFill>
                 <a:latin typeface="Amiri" pitchFamily="2" charset="-78"/>
+                <a:ea typeface="Amiri" pitchFamily="2" charset="-78"/>
                 <a:cs typeface="Amiri" pitchFamily="2" charset="-78"/>
               </a:rPr>
               <a:t>مَرْحَبًا، كَيْفَ أُسَاعِدُكَ؟</a:t>
@@ -11115,6 +11203,7 @@
                   <a:srgbClr val="1B3B6F"/>
                 </a:solidFill>
                 <a:latin typeface="Amiri" pitchFamily="2" charset="-78"/>
+                <a:ea typeface="Amiri" pitchFamily="2" charset="-78"/>
                 <a:cs typeface="Amiri" pitchFamily="2" charset="-78"/>
               </a:rPr>
               <a:t>نُرِيدُ أَنْ نَزُورَ السُّوقَ القَدِيمَ، لِأَنَّ أُمِّي تُحِبُّ التَّسَوُّقَ.</a:t>
@@ -11191,6 +11280,7 @@
                   <a:srgbClr val="1B3B6F"/>
                 </a:solidFill>
                 <a:latin typeface="Amiri" pitchFamily="2" charset="-78"/>
+                <a:ea typeface="Amiri" pitchFamily="2" charset="-78"/>
                 <a:cs typeface="Amiri" pitchFamily="2" charset="-78"/>
               </a:rPr>
               <a:t>هُنَاكَ المُتْحَفُ وَالشَّاطِئُ وَالسُّوقُ القَدِيمُ.</a:t>
@@ -11294,6 +11384,7 @@
                   <a:srgbClr val="1B3B6F"/>
                 </a:solidFill>
                 <a:latin typeface="Amiri" pitchFamily="2" charset="-78"/>
+                <a:ea typeface="Amiri" pitchFamily="2" charset="-78"/>
                 <a:cs typeface="Amiri" pitchFamily="2" charset="-78"/>
               </a:rPr>
               <a:t>وَمَتَى يُغْلِقُ، مِنْ فَضْلِكَ؟</a:t>
@@ -11370,6 +11461,7 @@
                   <a:srgbClr val="1B3B6F"/>
                 </a:solidFill>
                 <a:latin typeface="Amiri" pitchFamily="2" charset="-78"/>
+                <a:ea typeface="Amiri" pitchFamily="2" charset="-78"/>
                 <a:cs typeface="Amiri" pitchFamily="2" charset="-78"/>
               </a:rPr>
               <a:t>السُّوقُ يَفْتَحُ مِنَ التَّاسِعَةِ.</a:t>
@@ -11473,6 +11565,7 @@
                   <a:srgbClr val="1B3B6F"/>
                 </a:solidFill>
                 <a:latin typeface="Amiri" pitchFamily="2" charset="-78"/>
+                <a:ea typeface="Amiri" pitchFamily="2" charset="-78"/>
                 <a:cs typeface="Amiri" pitchFamily="2" charset="-78"/>
               </a:rPr>
               <a:t>رَائِعٌ! كَيْفَ نَصِلُ إِلَى المَطْعَمِ مِنْ هُنَا؟</a:t>
@@ -11549,6 +11642,7 @@
                   <a:srgbClr val="1B3B6F"/>
                 </a:solidFill>
                 <a:latin typeface="Amiri" pitchFamily="2" charset="-78"/>
+                <a:ea typeface="Amiri" pitchFamily="2" charset="-78"/>
                 <a:cs typeface="Amiri" pitchFamily="2" charset="-78"/>
               </a:rPr>
               <a:t>فِي السَّادِسَةِ. وَهُنَاكَ مَطْعَمٌ مَشْهُورٌ قَرِيبٌ.</a:t>
@@ -11652,6 +11746,7 @@
                   <a:srgbClr val="1B3B6F"/>
                 </a:solidFill>
                 <a:latin typeface="Amiri" pitchFamily="2" charset="-78"/>
+                <a:ea typeface="Amiri" pitchFamily="2" charset="-78"/>
                 <a:cs typeface="Amiri" pitchFamily="2" charset="-78"/>
               </a:rPr>
               <a:t>سَنَبْقَى ثَلَاثَةَ أَيَّامٍ، حَتَّى يَوْمِ الثُّلَاثَاءِ.</a:t>
@@ -11728,6 +11823,7 @@
                   <a:srgbClr val="1B3B6F"/>
                 </a:solidFill>
                 <a:latin typeface="Amiri" pitchFamily="2" charset="-78"/>
+                <a:ea typeface="Amiri" pitchFamily="2" charset="-78"/>
                 <a:cs typeface="Amiri" pitchFamily="2" charset="-78"/>
               </a:rPr>
               <a:t>كَمْ يَوْمًا سَتَبْقَوْنَ فِي المَدِينَةِ؟</a:t>
@@ -11937,6 +12033,7 @@
                   <a:srgbClr val="D4AF37"/>
                 </a:solidFill>
                 <a:latin typeface="Amiri" pitchFamily="2" charset="-78"/>
+                <a:ea typeface="Amiri" pitchFamily="2" charset="-78"/>
                 <a:cs typeface="Amiri" pitchFamily="2" charset="-78"/>
               </a:rPr>
               <a:t>م</a:t>
@@ -12257,6 +12354,7 @@
                   <a:srgbClr val="8A6D1E"/>
                 </a:solidFill>
                 <a:latin typeface="Amiri" pitchFamily="2" charset="-78"/>
+                <a:ea typeface="Amiri" pitchFamily="2" charset="-78"/>
                 <a:cs typeface="Amiri" pitchFamily="2" charset="-78"/>
               </a:rPr>
               <a:t>نَمُوذَجُ الإِجَابَةِ</a:t>
@@ -12499,6 +12597,7 @@
                   <a:srgbClr val="1B3B6F"/>
                 </a:solidFill>
                 <a:latin typeface="Amiri" pitchFamily="2" charset="-78"/>
+                <a:ea typeface="Amiri" pitchFamily="2" charset="-78"/>
                 <a:cs typeface="Amiri" pitchFamily="2" charset="-78"/>
               </a:rPr>
               <a:t>ذَهَبْتُ إِلَى الشَّاطِئِ مَعَ أُسْرَتِي وَأَوْلَادِ عَمِّي.</a:t>
@@ -12575,6 +12674,7 @@
                   <a:srgbClr val="1B3B6F"/>
                 </a:solidFill>
                 <a:latin typeface="Amiri" pitchFamily="2" charset="-78"/>
+                <a:ea typeface="Amiri" pitchFamily="2" charset="-78"/>
                 <a:cs typeface="Amiri" pitchFamily="2" charset="-78"/>
               </a:rPr>
               <a:t>أَيْنَ ذَهَبْتَ أَمْسِ؟</a:t>
@@ -12678,6 +12778,7 @@
                   <a:srgbClr val="1B3B6F"/>
                 </a:solidFill>
                 <a:latin typeface="Amiri" pitchFamily="2" charset="-78"/>
+                <a:ea typeface="Amiri" pitchFamily="2" charset="-78"/>
                 <a:cs typeface="Amiri" pitchFamily="2" charset="-78"/>
               </a:rPr>
               <a:t>سَبَحْنَا فِي الصَّبَاحِ، ثُمَّ لَعِبْنَا كُرَةَ الطَّائِرَةِ عَلَى الرَّمْلِ.</a:t>
@@ -12754,6 +12855,7 @@
                   <a:srgbClr val="1B3B6F"/>
                 </a:solidFill>
                 <a:latin typeface="Amiri" pitchFamily="2" charset="-78"/>
+                <a:ea typeface="Amiri" pitchFamily="2" charset="-78"/>
                 <a:cs typeface="Amiri" pitchFamily="2" charset="-78"/>
               </a:rPr>
               <a:t>مَاذَا فَعَلْتُمْ هُنَاكَ؟</a:t>
@@ -12857,6 +12959,7 @@
                   <a:srgbClr val="1B3B6F"/>
                 </a:solidFill>
                 <a:latin typeface="Amiri" pitchFamily="2" charset="-78"/>
+                <a:ea typeface="Amiri" pitchFamily="2" charset="-78"/>
                 <a:cs typeface="Amiri" pitchFamily="2" charset="-78"/>
               </a:rPr>
               <a:t>أَكَلْنَا سَمَكًا مَشْوِيًّا فِي مَطْعَمٍ صَغِيرٍ، وَكَانَ أَلَذَّ سَمَكٍ أَكَلْتُهُ!</a:t>
@@ -12933,6 +13036,7 @@
                   <a:srgbClr val="1B3B6F"/>
                 </a:solidFill>
                 <a:latin typeface="Amiri" pitchFamily="2" charset="-78"/>
+                <a:ea typeface="Amiri" pitchFamily="2" charset="-78"/>
                 <a:cs typeface="Amiri" pitchFamily="2" charset="-78"/>
               </a:rPr>
               <a:t>وَمَاذَا أَكَلْتُمْ؟</a:t>
@@ -13036,6 +13140,7 @@
                   <a:srgbClr val="1B3B6F"/>
                 </a:solidFill>
                 <a:latin typeface="Amiri" pitchFamily="2" charset="-78"/>
+                <a:ea typeface="Amiri" pitchFamily="2" charset="-78"/>
                 <a:cs typeface="Amiri" pitchFamily="2" charset="-78"/>
               </a:rPr>
               <a:t>سَلَامَتُكَ! وَكَيْفَ تَشْعُرُ الآنَ؟</a:t>
@@ -13112,6 +13217,7 @@
                   <a:srgbClr val="1B3B6F"/>
                 </a:solidFill>
                 <a:latin typeface="Amiri" pitchFamily="2" charset="-78"/>
+                <a:ea typeface="Amiri" pitchFamily="2" charset="-78"/>
                 <a:cs typeface="Amiri" pitchFamily="2" charset="-78"/>
               </a:rPr>
               <a:t>… أَنَا بَقِيتُ فِي البَيْتِ لِأَنِّي كُنْتُ مَرِيضًا.</a:t>
@@ -13215,6 +13321,7 @@
                   <a:srgbClr val="1B3B6F"/>
                 </a:solidFill>
                 <a:latin typeface="Amiri" pitchFamily="2" charset="-78"/>
+                <a:ea typeface="Amiri" pitchFamily="2" charset="-78"/>
                 <a:cs typeface="Amiri" pitchFamily="2" charset="-78"/>
               </a:rPr>
               <a:t>نَعَمْ، سَنَذْهَبُ فِي العُطْلَةِ القَادِمَةِ، فَهَلْ تَأْتِي مَعَنَا؟</a:t>
@@ -13291,6 +13398,7 @@
                   <a:srgbClr val="1B3B6F"/>
                 </a:solidFill>
                 <a:latin typeface="Amiri" pitchFamily="2" charset="-78"/>
+                <a:ea typeface="Amiri" pitchFamily="2" charset="-78"/>
                 <a:cs typeface="Amiri" pitchFamily="2" charset="-78"/>
               </a:rPr>
               <a:t>هَلْ سَتَذْهَبُونَ مَرَّةً أُخْرَى؟</a:t>
@@ -13500,6 +13608,7 @@
                   <a:srgbClr val="D4AF37"/>
                 </a:solidFill>
                 <a:latin typeface="Amiri" pitchFamily="2" charset="-78"/>
+                <a:ea typeface="Amiri" pitchFamily="2" charset="-78"/>
                 <a:cs typeface="Amiri" pitchFamily="2" charset="-78"/>
               </a:rPr>
               <a:t>م</a:t>
@@ -13820,6 +13929,7 @@
                   <a:srgbClr val="8A6D1E"/>
                 </a:solidFill>
                 <a:latin typeface="Amiri" pitchFamily="2" charset="-78"/>
+                <a:ea typeface="Amiri" pitchFamily="2" charset="-78"/>
                 <a:cs typeface="Amiri" pitchFamily="2" charset="-78"/>
               </a:rPr>
               <a:t>نَمُوذَجُ الإِجَابَةِ</a:t>
@@ -14062,6 +14172,7 @@
                   <a:srgbClr val="1B3B6F"/>
                 </a:solidFill>
                 <a:latin typeface="Amiri" pitchFamily="2" charset="-78"/>
+                <a:ea typeface="Amiri" pitchFamily="2" charset="-78"/>
                 <a:cs typeface="Amiri" pitchFamily="2" charset="-78"/>
               </a:rPr>
               <a:t>يَقْضِي كَثِيرٌ مِنْهُمْ وَقْتَهُمْ أَمَامَ الشَّاشَاتِ، وَهٰذَا فِي رَأْيِي غَيْرُ صِحِّيٍّ.</a:t>
@@ -14138,6 +14249,7 @@
                   <a:srgbClr val="1B3B6F"/>
                 </a:solidFill>
                 <a:latin typeface="Amiri" pitchFamily="2" charset="-78"/>
+                <a:ea typeface="Amiri" pitchFamily="2" charset="-78"/>
                 <a:cs typeface="Amiri" pitchFamily="2" charset="-78"/>
               </a:rPr>
               <a:t>كَيْفَ يَقْضِي الشَّبَابُ عُطْلَةَ نِهَايَةِ الأُسْبُوعِ اليَوْمَ؟</a:t>
@@ -14241,6 +14353,7 @@
                   <a:srgbClr val="1B3B6F"/>
                 </a:solidFill>
                 <a:latin typeface="Amiri" pitchFamily="2" charset="-78"/>
+                <a:ea typeface="Amiri" pitchFamily="2" charset="-78"/>
                 <a:cs typeface="Amiri" pitchFamily="2" charset="-78"/>
               </a:rPr>
               <a:t>كَانَ الشَّبَابُ يَخْرُجُونَ إِلَى الطَّبِيعَةِ أَكْثَرَ، أَمَّا اليَوْمَ فَيُفَضِّلُونَ المَرَاكِزَ التِّجَارِيَّةَ.</a:t>
@@ -14317,6 +14430,7 @@
                   <a:srgbClr val="1B3B6F"/>
                 </a:solidFill>
                 <a:latin typeface="Amiri" pitchFamily="2" charset="-78"/>
+                <a:ea typeface="Amiri" pitchFamily="2" charset="-78"/>
                 <a:cs typeface="Amiri" pitchFamily="2" charset="-78"/>
               </a:rPr>
               <a:t>وَكَيْفَ كَانَ الأَمْرُ فِي المَاضِي؟</a:t>
@@ -14420,6 +14534,7 @@
                   <a:srgbClr val="1B3B6F"/>
                 </a:solidFill>
                 <a:latin typeface="Amiri" pitchFamily="2" charset="-78"/>
+                <a:ea typeface="Amiri" pitchFamily="2" charset="-78"/>
                 <a:cs typeface="Amiri" pitchFamily="2" charset="-78"/>
               </a:rPr>
               <a:t>ذَهَبْنَا إِلَى الجَبَلِ، وَفَجْأَةً بَدَأَ المَطَرُ، فَاخْتَبَأْنَا فِي كَهْفٍ صَغِيرٍ وَضَحِكْنَا كَثِيرًا.</a:t>
@@ -14496,6 +14611,7 @@
                   <a:srgbClr val="1B3B6F"/>
                 </a:solidFill>
                 <a:latin typeface="Amiri" pitchFamily="2" charset="-78"/>
+                <a:ea typeface="Amiri" pitchFamily="2" charset="-78"/>
                 <a:cs typeface="Amiri" pitchFamily="2" charset="-78"/>
               </a:rPr>
               <a:t>صِفْ لَنَا نُزْهَةً لَا تَنْسَاهَا.</a:t>
@@ -14599,6 +14715,7 @@
                   <a:srgbClr val="1B3B6F"/>
                 </a:solidFill>
                 <a:latin typeface="Amiri" pitchFamily="2" charset="-78"/>
+                <a:ea typeface="Amiri" pitchFamily="2" charset="-78"/>
                 <a:cs typeface="Amiri" pitchFamily="2" charset="-78"/>
               </a:rPr>
               <a:t>صَحِيحٌ أَنَّ بَعْضَهَا غَالٍ، غَيْرَ أَنَّ المَشْيَ فِي الحَدِيقَةِ أَوْ عَلَى الشَّاطِئِ مَجَّانِيٌّ وَمُفِيدٌ.</a:t>
@@ -14675,6 +14792,7 @@
                   <a:srgbClr val="1B3B6F"/>
                 </a:solidFill>
                 <a:latin typeface="Amiri" pitchFamily="2" charset="-78"/>
+                <a:ea typeface="Amiri" pitchFamily="2" charset="-78"/>
                 <a:cs typeface="Amiri" pitchFamily="2" charset="-78"/>
               </a:rPr>
               <a:t>يَقُولُ البَعْضُ إِنَّ النُّزُهَاتِ غَالِيَةٌ جِدًّا.</a:t>
@@ -14778,6 +14896,7 @@
                   <a:srgbClr val="1B3B6F"/>
                 </a:solidFill>
                 <a:latin typeface="Amiri" pitchFamily="2" charset="-78"/>
+                <a:ea typeface="Amiri" pitchFamily="2" charset="-78"/>
                 <a:cs typeface="Amiri" pitchFamily="2" charset="-78"/>
               </a:rPr>
               <a:t>لَوْ كُنْتُ أَسْتَطِيعُ، لَذَهَبْتُ إِلَى البَتْرَاءِ، لِأَنِّي أَحْلُمُ بِرُؤْيَتِهَا مُنْذُ سَنَوَاتٍ.</a:t>
@@ -14857,6 +14976,7 @@
                   <a:srgbClr val="1B3B6F"/>
                 </a:solidFill>
                 <a:latin typeface="Amiri" pitchFamily="2" charset="-78"/>
+                <a:ea typeface="Amiri" pitchFamily="2" charset="-78"/>
                 <a:cs typeface="Amiri" pitchFamily="2" charset="-78"/>
               </a:rPr>
               <a:t>لَوْ كُنْتَ تَسْتَطِيعُ أَنْ تَذْهَبَ إِلَى أَيِّ مَكَانٍ غَدًا، أَيْنَ تَذْهَبُ؟</a:t>
@@ -15066,6 +15186,7 @@
                   <a:srgbClr val="D4AF37"/>
                 </a:solidFill>
                 <a:latin typeface="Amiri" pitchFamily="2" charset="-78"/>
+                <a:ea typeface="Amiri" pitchFamily="2" charset="-78"/>
                 <a:cs typeface="Amiri" pitchFamily="2" charset="-78"/>
               </a:rPr>
               <a:t>م</a:t>
@@ -15386,6 +15507,7 @@
                   <a:srgbClr val="8A6D1E"/>
                 </a:solidFill>
                 <a:latin typeface="Amiri" pitchFamily="2" charset="-78"/>
+                <a:ea typeface="Amiri" pitchFamily="2" charset="-78"/>
                 <a:cs typeface="Amiri" pitchFamily="2" charset="-78"/>
               </a:rPr>
               <a:t>نِهَايَةُ الأُسْبُوعِ</a:t>
@@ -15666,6 +15788,7 @@
                   <a:srgbClr val="1B3B6F"/>
                 </a:solidFill>
                 <a:latin typeface="Amiri" pitchFamily="2" charset="-78"/>
+                <a:ea typeface="Amiri" pitchFamily="2" charset="-78"/>
                 <a:cs typeface="Amiri" pitchFamily="2" charset="-78"/>
               </a:rPr>
               <a:t>يَوْمَ السَّبْتِ عَادَةً …</a:t>
@@ -15742,6 +15865,7 @@
                   <a:srgbClr val="1B3B6F"/>
                 </a:solidFill>
                 <a:latin typeface="Amiri" pitchFamily="2" charset="-78"/>
+                <a:ea typeface="Amiri" pitchFamily="2" charset="-78"/>
                 <a:cs typeface="Amiri" pitchFamily="2" charset="-78"/>
               </a:rPr>
               <a:t>مَاذَا تَفْعَلُ يَوْمَ السَّبْتِ عَادَةً؟</a:t>
@@ -15910,6 +16034,7 @@
                   <a:srgbClr val="1B3B6F"/>
                 </a:solidFill>
                 <a:latin typeface="Amiri" pitchFamily="2" charset="-78"/>
+                <a:ea typeface="Amiri" pitchFamily="2" charset="-78"/>
                 <a:cs typeface="Amiri" pitchFamily="2" charset="-78"/>
               </a:rPr>
               <a:t>أَسْتَيْقِظُ فِي السَّاعَةِ …</a:t>
@@ -15986,6 +16111,7 @@
                   <a:srgbClr val="1B3B6F"/>
                 </a:solidFill>
                 <a:latin typeface="Amiri" pitchFamily="2" charset="-78"/>
+                <a:ea typeface="Amiri" pitchFamily="2" charset="-78"/>
                 <a:cs typeface="Amiri" pitchFamily="2" charset="-78"/>
               </a:rPr>
               <a:t>فِي أَيِّ سَاعَةٍ تَسْتَيْقِظُ فِي نِهَايَةِ الأُسْبُوعِ؟</a:t>
@@ -16154,6 +16280,7 @@
                   <a:srgbClr val="1B3B6F"/>
                 </a:solidFill>
                 <a:latin typeface="Amiri" pitchFamily="2" charset="-78"/>
+                <a:ea typeface="Amiri" pitchFamily="2" charset="-78"/>
                 <a:cs typeface="Amiri" pitchFamily="2" charset="-78"/>
               </a:rPr>
               <a:t>أُحِبُّ أَنْ أَذْهَبَ إِلَى …</a:t>
@@ -16230,6 +16357,7 @@
                   <a:srgbClr val="1B3B6F"/>
                 </a:solidFill>
                 <a:latin typeface="Amiri" pitchFamily="2" charset="-78"/>
+                <a:ea typeface="Amiri" pitchFamily="2" charset="-78"/>
                 <a:cs typeface="Amiri" pitchFamily="2" charset="-78"/>
               </a:rPr>
               <a:t>أَيْنَ تُحِبُّ أَنْ تَذْهَبَ مَعَ أُسْرَتِكَ؟</a:t>
@@ -16398,6 +16526,7 @@
                   <a:srgbClr val="1B3B6F"/>
                 </a:solidFill>
                 <a:latin typeface="Amiri" pitchFamily="2" charset="-78"/>
+                <a:ea typeface="Amiri" pitchFamily="2" charset="-78"/>
                 <a:cs typeface="Amiri" pitchFamily="2" charset="-78"/>
               </a:rPr>
               <a:t>نَأْكُلُ …</a:t>
@@ -16474,6 +16603,7 @@
                   <a:srgbClr val="1B3B6F"/>
                 </a:solidFill>
                 <a:latin typeface="Amiri" pitchFamily="2" charset="-78"/>
+                <a:ea typeface="Amiri" pitchFamily="2" charset="-78"/>
                 <a:cs typeface="Amiri" pitchFamily="2" charset="-78"/>
               </a:rPr>
               <a:t>مَاذَا تَأْكُلُونَ فِي النُّزْهَةِ؟</a:t>
@@ -16642,6 +16772,7 @@
                   <a:srgbClr val="1B3B6F"/>
                 </a:solidFill>
                 <a:latin typeface="Amiri" pitchFamily="2" charset="-78"/>
+                <a:ea typeface="Amiri" pitchFamily="2" charset="-78"/>
                 <a:cs typeface="Amiri" pitchFamily="2" charset="-78"/>
               </a:rPr>
               <a:t>ذَهَبْتُ إِلَى …</a:t>
@@ -16718,6 +16849,7 @@
                   <a:srgbClr val="1B3B6F"/>
                 </a:solidFill>
                 <a:latin typeface="Amiri" pitchFamily="2" charset="-78"/>
+                <a:ea typeface="Amiri" pitchFamily="2" charset="-78"/>
                 <a:cs typeface="Amiri" pitchFamily="2" charset="-78"/>
               </a:rPr>
               <a:t>أَيْنَ ذَهَبْتَ فِي نِهَايَةِ الأُسْبُوعِ المَاضِي؟</a:t>
@@ -16872,6 +17004,7 @@
                   <a:srgbClr val="1B3B6F"/>
                 </a:solidFill>
                 <a:latin typeface="Amiri" pitchFamily="2" charset="-78"/>
+                <a:ea typeface="Amiri" pitchFamily="2" charset="-78"/>
                 <a:cs typeface="Amiri" pitchFamily="2" charset="-78"/>
               </a:rPr>
               <a:t>عَفْوًا، هَلْ يُمْكِنُ أَنْ تُعِيدَ السُّؤَالَ؟</a:t>
@@ -17005,6 +17138,7 @@
                   <a:srgbClr val="D4AF37"/>
                 </a:solidFill>
                 <a:latin typeface="Amiri" pitchFamily="2" charset="-78"/>
+                <a:ea typeface="Amiri" pitchFamily="2" charset="-78"/>
                 <a:cs typeface="Amiri" pitchFamily="2" charset="-78"/>
               </a:rPr>
               <a:t>م</a:t>
@@ -17325,6 +17459,7 @@
                   <a:srgbClr val="8A6D1E"/>
                 </a:solidFill>
                 <a:latin typeface="Amiri" pitchFamily="2" charset="-78"/>
+                <a:ea typeface="Amiri" pitchFamily="2" charset="-78"/>
                 <a:cs typeface="Amiri" pitchFamily="2" charset="-78"/>
               </a:rPr>
               <a:t>نُزْهَاتِي</a:t>
@@ -17605,6 +17740,7 @@
                   <a:srgbClr val="1B3B6F"/>
                 </a:solidFill>
                 <a:latin typeface="Amiri" pitchFamily="2" charset="-78"/>
+                <a:ea typeface="Amiri" pitchFamily="2" charset="-78"/>
                 <a:cs typeface="Amiri" pitchFamily="2" charset="-78"/>
               </a:rPr>
               <a:t>فِي … ذَهَبْنَا إِلَى … وَ…</a:t>
@@ -17681,6 +17817,7 @@
                   <a:srgbClr val="1B3B6F"/>
                 </a:solidFill>
                 <a:latin typeface="Amiri" pitchFamily="2" charset="-78"/>
+                <a:ea typeface="Amiri" pitchFamily="2" charset="-78"/>
                 <a:cs typeface="Amiri" pitchFamily="2" charset="-78"/>
               </a:rPr>
               <a:t>صِفْ نُزْهَةً جَمِيلَةً قُمْتَ بِهَا.</a:t>
@@ -17784,6 +17921,7 @@
                   <a:srgbClr val="1B3B6F"/>
                 </a:solidFill>
                 <a:latin typeface="Amiri" pitchFamily="2" charset="-78"/>
+                <a:ea typeface="Amiri" pitchFamily="2" charset="-78"/>
                 <a:cs typeface="Amiri" pitchFamily="2" charset="-78"/>
               </a:rPr>
               <a:t>نَذْهَبُ بِالسَّيَّارَةِ، وَتَسْتَغْرِقُ …</a:t>
@@ -17860,6 +17998,7 @@
                   <a:srgbClr val="1B3B6F"/>
                 </a:solidFill>
                 <a:latin typeface="Amiri" pitchFamily="2" charset="-78"/>
+                <a:ea typeface="Amiri" pitchFamily="2" charset="-78"/>
                 <a:cs typeface="Amiri" pitchFamily="2" charset="-78"/>
               </a:rPr>
               <a:t>كَيْفَ تَذْهَبُونَ إِلَى النُّزْهَةِ؟ وَكَمْ تَسْتَغْرِقُ الرِّحْلَةُ؟</a:t>
@@ -17963,6 +18102,7 @@
                   <a:srgbClr val="1B3B6F"/>
                 </a:solidFill>
                 <a:latin typeface="Amiri" pitchFamily="2" charset="-78"/>
+                <a:ea typeface="Amiri" pitchFamily="2" charset="-78"/>
                 <a:cs typeface="Amiri" pitchFamily="2" charset="-78"/>
               </a:rPr>
               <a:t>أُفَضِّلُ … لِأَنَّ …</a:t>
@@ -18039,6 +18179,7 @@
                   <a:srgbClr val="1B3B6F"/>
                 </a:solidFill>
                 <a:latin typeface="Amiri" pitchFamily="2" charset="-78"/>
+                <a:ea typeface="Amiri" pitchFamily="2" charset="-78"/>
                 <a:cs typeface="Amiri" pitchFamily="2" charset="-78"/>
               </a:rPr>
               <a:t>هَلْ تُفَضِّلُ النُّزْهَةَ فِي المَدِينَةِ أَمْ فِي الطَّبِيعَةِ؟</a:t>
@@ -18142,6 +18283,7 @@
                   <a:srgbClr val="1B3B6F"/>
                 </a:solidFill>
                 <a:latin typeface="Amiri" pitchFamily="2" charset="-78"/>
+                <a:ea typeface="Amiri" pitchFamily="2" charset="-78"/>
                 <a:cs typeface="Amiri" pitchFamily="2" charset="-78"/>
               </a:rPr>
               <a:t>لِأَنَّنَا نَمْشِي … وَ…</a:t>
@@ -18218,6 +18360,7 @@
                   <a:srgbClr val="1B3B6F"/>
                 </a:solidFill>
                 <a:latin typeface="Amiri" pitchFamily="2" charset="-78"/>
+                <a:ea typeface="Amiri" pitchFamily="2" charset="-78"/>
                 <a:cs typeface="Amiri" pitchFamily="2" charset="-78"/>
               </a:rPr>
               <a:t>لِمَاذَا النُّزُهَاتُ مُفِيدَةٌ لِلصِّحَّةِ؟</a:t>
@@ -18321,6 +18464,7 @@
                   <a:srgbClr val="1B3B6F"/>
                 </a:solidFill>
                 <a:latin typeface="Amiri" pitchFamily="2" charset="-78"/>
+                <a:ea typeface="Amiri" pitchFamily="2" charset="-78"/>
                 <a:cs typeface="Amiri" pitchFamily="2" charset="-78"/>
               </a:rPr>
               <a:t>سَأَزُورُ … ثُمَّ سَنَأْكُلُ …</a:t>
@@ -18397,6 +18541,7 @@
                   <a:srgbClr val="1B3B6F"/>
                 </a:solidFill>
                 <a:latin typeface="Amiri" pitchFamily="2" charset="-78"/>
+                <a:ea typeface="Amiri" pitchFamily="2" charset="-78"/>
                 <a:cs typeface="Amiri" pitchFamily="2" charset="-78"/>
               </a:rPr>
               <a:t>مَا خُطَطُكَ لِنِهَايَةِ الأُسْبُوعِ القَادِمِ؟</a:t>
@@ -18606,6 +18751,7 @@
                   <a:srgbClr val="D4AF37"/>
                 </a:solidFill>
                 <a:latin typeface="Amiri" pitchFamily="2" charset="-78"/>
+                <a:ea typeface="Amiri" pitchFamily="2" charset="-78"/>
                 <a:cs typeface="Amiri" pitchFamily="2" charset="-78"/>
               </a:rPr>
               <a:t>م</a:t>
@@ -18926,6 +19072,7 @@
                   <a:srgbClr val="8A6D1E"/>
                 </a:solidFill>
                 <a:latin typeface="Amiri" pitchFamily="2" charset="-78"/>
+                <a:ea typeface="Amiri" pitchFamily="2" charset="-78"/>
                 <a:cs typeface="Amiri" pitchFamily="2" charset="-78"/>
               </a:rPr>
               <a:t>الوَقْتُ الحُرُّ وَالمُجْتَمَعُ</a:t>
@@ -19206,6 +19353,7 @@
                   <a:srgbClr val="1B3B6F"/>
                 </a:solidFill>
                 <a:latin typeface="Amiri" pitchFamily="2" charset="-78"/>
+                <a:ea typeface="Amiri" pitchFamily="2" charset="-78"/>
                 <a:cs typeface="Amiri" pitchFamily="2" charset="-78"/>
               </a:rPr>
               <a:t>لَا أَظُنُّ ذٰلِكَ، لِأَنَّ …</a:t>
@@ -19282,6 +19430,7 @@
                   <a:srgbClr val="1B3B6F"/>
                 </a:solidFill>
                 <a:latin typeface="Amiri" pitchFamily="2" charset="-78"/>
+                <a:ea typeface="Amiri" pitchFamily="2" charset="-78"/>
                 <a:cs typeface="Amiri" pitchFamily="2" charset="-78"/>
               </a:rPr>
               <a:t>هَلْ يَقْضِي الشَّبَابُ وَقْتًا كَافِيًا مَعَ أُسَرِهِمْ؟</a:t>
@@ -19385,6 +19534,7 @@
                   <a:srgbClr val="1B3B6F"/>
                 </a:solidFill>
                 <a:latin typeface="Amiri" pitchFamily="2" charset="-78"/>
+                <a:ea typeface="Amiri" pitchFamily="2" charset="-78"/>
                 <a:cs typeface="Amiri" pitchFamily="2" charset="-78"/>
               </a:rPr>
               <a:t>كَانَ أَبِي يَقْضِي … أَمَّا أَنَا فَأَقْضِي …</a:t>
@@ -19464,6 +19614,7 @@
                   <a:srgbClr val="1B3B6F"/>
                 </a:solidFill>
                 <a:latin typeface="Amiri" pitchFamily="2" charset="-78"/>
+                <a:ea typeface="Amiri" pitchFamily="2" charset="-78"/>
                 <a:cs typeface="Amiri" pitchFamily="2" charset="-78"/>
               </a:rPr>
               <a:t>مَا الفَرْقُ بَيْنَ عُطْلَةِ نِهَايَةِ الأُسْبُوعِ عِنْدَكَ وَعِنْدَ وَالِدَيْكَ عِنْدَمَا كَانَا صَغِيرَيْنِ؟</a:t>
@@ -19567,6 +19718,7 @@
                   <a:srgbClr val="1B3B6F"/>
                 </a:solidFill>
                 <a:latin typeface="Amiri" pitchFamily="2" charset="-78"/>
+                <a:ea typeface="Amiri" pitchFamily="2" charset="-78"/>
                 <a:cs typeface="Amiri" pitchFamily="2" charset="-78"/>
               </a:rPr>
               <a:t>صَحِيحٌ أَنَّ … غَيْرَ أَنَّ …</a:t>
@@ -19643,6 +19795,7 @@
                   <a:srgbClr val="1B3B6F"/>
                 </a:solidFill>
                 <a:latin typeface="Amiri" pitchFamily="2" charset="-78"/>
+                <a:ea typeface="Amiri" pitchFamily="2" charset="-78"/>
                 <a:cs typeface="Amiri" pitchFamily="2" charset="-78"/>
               </a:rPr>
               <a:t>هَلْ يَجِبُ أَنْ تَكُونَ المَتَاحِفُ مَجَّانِيَّةً؟</a:t>
@@ -19746,6 +19899,7 @@
                   <a:srgbClr val="1B3B6F"/>
                 </a:solidFill>
                 <a:latin typeface="Amiri" pitchFamily="2" charset="-78"/>
+                <a:ea typeface="Amiri" pitchFamily="2" charset="-78"/>
                 <a:cs typeface="Amiri" pitchFamily="2" charset="-78"/>
               </a:rPr>
               <a:t>أَجْمَلُ مَكَانٍ زُرْتُهُ هُوَ … لِأَنَّ …</a:t>
@@ -19822,6 +19976,7 @@
                   <a:srgbClr val="1B3B6F"/>
                 </a:solidFill>
                 <a:latin typeface="Amiri" pitchFamily="2" charset="-78"/>
+                <a:ea typeface="Amiri" pitchFamily="2" charset="-78"/>
                 <a:cs typeface="Amiri" pitchFamily="2" charset="-78"/>
               </a:rPr>
               <a:t>مَا أَجْمَلُ مَكَانٍ زُرْتَهُ؟ وَلِمَاذَا؟</a:t>
@@ -19925,6 +20080,7 @@
                   <a:srgbClr val="1B3B6F"/>
                 </a:solidFill>
                 <a:latin typeface="Amiri" pitchFamily="2" charset="-78"/>
+                <a:ea typeface="Amiri" pitchFamily="2" charset="-78"/>
                 <a:cs typeface="Amiri" pitchFamily="2" charset="-78"/>
               </a:rPr>
               <a:t>لَوْ نَظَّمْتُ …، لَبَدَأْنَا … ثُمَّ …</a:t>
@@ -20001,6 +20157,7 @@
                   <a:srgbClr val="1B3B6F"/>
                 </a:solidFill>
                 <a:latin typeface="Amiri" pitchFamily="2" charset="-78"/>
+                <a:ea typeface="Amiri" pitchFamily="2" charset="-78"/>
                 <a:cs typeface="Amiri" pitchFamily="2" charset="-78"/>
               </a:rPr>
               <a:t>لَوْ نَظَّمْتَ يَوْمًا مِثَالِيًّا لِصَفِّكَ، كَيْفَ يَكُونُ؟</a:t>
@@ -20210,6 +20367,7 @@
                   <a:srgbClr val="D4AF37"/>
                 </a:solidFill>
                 <a:latin typeface="Amiri" pitchFamily="2" charset="-78"/>
+                <a:ea typeface="Amiri" pitchFamily="2" charset="-78"/>
                 <a:cs typeface="Amiri" pitchFamily="2" charset="-78"/>
               </a:rPr>
               <a:t>م</a:t>
@@ -20530,6 +20688,7 @@
                   <a:srgbClr val="8A6D1E"/>
                 </a:solidFill>
                 <a:latin typeface="Amiri" pitchFamily="2" charset="-78"/>
+                <a:ea typeface="Amiri" pitchFamily="2" charset="-78"/>
                 <a:cs typeface="Amiri" pitchFamily="2" charset="-78"/>
               </a:rPr>
               <a:t>آدَابُ الصَّفِّ</a:t>
@@ -22061,6 +22220,7 @@
                   <a:srgbClr val="D4AF37"/>
                 </a:solidFill>
                 <a:latin typeface="Amiri" pitchFamily="2" charset="-78"/>
+                <a:ea typeface="Amiri" pitchFamily="2" charset="-78"/>
                 <a:cs typeface="Amiri" pitchFamily="2" charset="-78"/>
               </a:rPr>
               <a:t>م</a:t>
@@ -22381,6 +22541,7 @@
                   <a:srgbClr val="8A6D1E"/>
                 </a:solidFill>
                 <a:latin typeface="Amiri" pitchFamily="2" charset="-78"/>
+                <a:ea typeface="Amiri" pitchFamily="2" charset="-78"/>
                 <a:cs typeface="Amiri" pitchFamily="2" charset="-78"/>
               </a:rPr>
               <a:t>نَمُوذَجُ الإِجَابَةِ</a:t>
@@ -22623,6 +22784,7 @@
                   <a:srgbClr val="1B3B6F"/>
                 </a:solidFill>
                 <a:latin typeface="Amiri" pitchFamily="2" charset="-78"/>
+                <a:ea typeface="Amiri" pitchFamily="2" charset="-78"/>
                 <a:cs typeface="Amiri" pitchFamily="2" charset="-78"/>
               </a:rPr>
               <a:t>يَوْمَ السَّبْتِ عَادَةً أَلْعَبُ كُرَةَ القَدَمِ، ثُمَّ أَزُورُ جَدَّتِي.</a:t>
@@ -22699,6 +22861,7 @@
                   <a:srgbClr val="1B3B6F"/>
                 </a:solidFill>
                 <a:latin typeface="Amiri" pitchFamily="2" charset="-78"/>
+                <a:ea typeface="Amiri" pitchFamily="2" charset="-78"/>
                 <a:cs typeface="Amiri" pitchFamily="2" charset="-78"/>
               </a:rPr>
               <a:t>مَاذَا تَفْعَلُ يَوْمَ السَّبْتِ عَادَةً؟</a:t>
@@ -22802,6 +22965,7 @@
                   <a:srgbClr val="1B3B6F"/>
                 </a:solidFill>
                 <a:latin typeface="Amiri" pitchFamily="2" charset="-78"/>
+                <a:ea typeface="Amiri" pitchFamily="2" charset="-78"/>
                 <a:cs typeface="Amiri" pitchFamily="2" charset="-78"/>
               </a:rPr>
               <a:t>أَسْتَيْقِظُ فِي السَّاعَةِ التَّاسِعَةِ، لِأَنِّي أُحِبُّ النَّوْمَ!</a:t>
@@ -22878,6 +23042,7 @@
                   <a:srgbClr val="1B3B6F"/>
                 </a:solidFill>
                 <a:latin typeface="Amiri" pitchFamily="2" charset="-78"/>
+                <a:ea typeface="Amiri" pitchFamily="2" charset="-78"/>
                 <a:cs typeface="Amiri" pitchFamily="2" charset="-78"/>
               </a:rPr>
               <a:t>فِي أَيِّ سَاعَةٍ تَسْتَيْقِظُ فِي نِهَايَةِ الأُسْبُوعِ؟</a:t>
@@ -22981,6 +23146,7 @@
                   <a:srgbClr val="1B3B6F"/>
                 </a:solidFill>
                 <a:latin typeface="Amiri" pitchFamily="2" charset="-78"/>
+                <a:ea typeface="Amiri" pitchFamily="2" charset="-78"/>
                 <a:cs typeface="Amiri" pitchFamily="2" charset="-78"/>
               </a:rPr>
               <a:t>أُحِبُّ أَنْ أَذْهَبَ إِلَى الشَّاطِئِ مَعَ أُسْرَتِي.</a:t>
@@ -23057,6 +23223,7 @@
                   <a:srgbClr val="1B3B6F"/>
                 </a:solidFill>
                 <a:latin typeface="Amiri" pitchFamily="2" charset="-78"/>
+                <a:ea typeface="Amiri" pitchFamily="2" charset="-78"/>
                 <a:cs typeface="Amiri" pitchFamily="2" charset="-78"/>
               </a:rPr>
               <a:t>أَيْنَ تُحِبُّ أَنْ تَذْهَبَ مَعَ أُسْرَتِكَ؟</a:t>
@@ -23160,6 +23327,7 @@
                   <a:srgbClr val="1B3B6F"/>
                 </a:solidFill>
                 <a:latin typeface="Amiri" pitchFamily="2" charset="-78"/>
+                <a:ea typeface="Amiri" pitchFamily="2" charset="-78"/>
                 <a:cs typeface="Amiri" pitchFamily="2" charset="-78"/>
               </a:rPr>
               <a:t>نَأْكُلُ السَّنْدَوِيشَاتِ وَالفَوَاكِهَ، وَنَشْرَبُ العَصِيرَ.</a:t>
@@ -23236,6 +23404,7 @@
                   <a:srgbClr val="1B3B6F"/>
                 </a:solidFill>
                 <a:latin typeface="Amiri" pitchFamily="2" charset="-78"/>
+                <a:ea typeface="Amiri" pitchFamily="2" charset="-78"/>
                 <a:cs typeface="Amiri" pitchFamily="2" charset="-78"/>
               </a:rPr>
               <a:t>مَاذَا تَأْكُلُونَ فِي النُّزْهَةِ؟</a:t>
@@ -23339,6 +23508,7 @@
                   <a:srgbClr val="1B3B6F"/>
                 </a:solidFill>
                 <a:latin typeface="Amiri" pitchFamily="2" charset="-78"/>
+                <a:ea typeface="Amiri" pitchFamily="2" charset="-78"/>
                 <a:cs typeface="Amiri" pitchFamily="2" charset="-78"/>
               </a:rPr>
               <a:t>ذَهَبْتُ إِلَى السُّوقِ مَعَ أُمِّي، وَاشْتَرَيْتُ حِذَاءً جَدِيدًا.</a:t>
@@ -23415,6 +23585,7 @@
                   <a:srgbClr val="1B3B6F"/>
                 </a:solidFill>
                 <a:latin typeface="Amiri" pitchFamily="2" charset="-78"/>
+                <a:ea typeface="Amiri" pitchFamily="2" charset="-78"/>
                 <a:cs typeface="Amiri" pitchFamily="2" charset="-78"/>
               </a:rPr>
               <a:t>أَيْنَ ذَهَبْتَ فِي نِهَايَةِ الأُسْبُوعِ المَاضِي؟</a:t>
@@ -23624,6 +23795,7 @@
                   <a:srgbClr val="D4AF37"/>
                 </a:solidFill>
                 <a:latin typeface="Amiri" pitchFamily="2" charset="-78"/>
+                <a:ea typeface="Amiri" pitchFamily="2" charset="-78"/>
                 <a:cs typeface="Amiri" pitchFamily="2" charset="-78"/>
               </a:rPr>
               <a:t>م</a:t>
@@ -23944,6 +24116,7 @@
                   <a:srgbClr val="8A6D1E"/>
                 </a:solidFill>
                 <a:latin typeface="Amiri" pitchFamily="2" charset="-78"/>
+                <a:ea typeface="Amiri" pitchFamily="2" charset="-78"/>
                 <a:cs typeface="Amiri" pitchFamily="2" charset="-78"/>
               </a:rPr>
               <a:t>نَمُوذَجُ الإِجَابَةِ</a:t>
@@ -24186,6 +24359,7 @@
                   <a:srgbClr val="1B3B6F"/>
                 </a:solidFill>
                 <a:latin typeface="Amiri" pitchFamily="2" charset="-78"/>
+                <a:ea typeface="Amiri" pitchFamily="2" charset="-78"/>
                 <a:cs typeface="Amiri" pitchFamily="2" charset="-78"/>
               </a:rPr>
               <a:t>فِي الرَّبِيعِ ذَهَبْنَا إِلَى مَزْرَعَةِ عَمِّي، وَقَطَفْنَا الفَرَاوِلَةَ، وَأَكَلْنَا الغَدَاءَ تَحْتَ الأَشْجَارِ.</a:t>
@@ -24262,6 +24436,7 @@
                   <a:srgbClr val="1B3B6F"/>
                 </a:solidFill>
                 <a:latin typeface="Amiri" pitchFamily="2" charset="-78"/>
+                <a:ea typeface="Amiri" pitchFamily="2" charset="-78"/>
                 <a:cs typeface="Amiri" pitchFamily="2" charset="-78"/>
               </a:rPr>
               <a:t>صِفْ نُزْهَةً جَمِيلَةً قُمْتَ بِهَا.</a:t>
@@ -24365,6 +24540,7 @@
                   <a:srgbClr val="1B3B6F"/>
                 </a:solidFill>
                 <a:latin typeface="Amiri" pitchFamily="2" charset="-78"/>
+                <a:ea typeface="Amiri" pitchFamily="2" charset="-78"/>
                 <a:cs typeface="Amiri" pitchFamily="2" charset="-78"/>
               </a:rPr>
               <a:t>نَذْهَبُ بِالسَّيَّارَةِ عَادَةً، وَتَسْتَغْرِقُ الرِّحْلَةُ سَاعَةً، فَنُغَنِّي فِي الطَّرِيقِ.</a:t>
@@ -24444,6 +24620,7 @@
                   <a:srgbClr val="1B3B6F"/>
                 </a:solidFill>
                 <a:latin typeface="Amiri" pitchFamily="2" charset="-78"/>
+                <a:ea typeface="Amiri" pitchFamily="2" charset="-78"/>
                 <a:cs typeface="Amiri" pitchFamily="2" charset="-78"/>
               </a:rPr>
               <a:t>كَيْفَ تَذْهَبُونَ إِلَى النُّزْهَةِ؟ وَكَمْ تَسْتَغْرِقُ الرِّحْلَةُ؟</a:t>
@@ -24547,6 +24724,7 @@
                   <a:srgbClr val="1B3B6F"/>
                 </a:solidFill>
                 <a:latin typeface="Amiri" pitchFamily="2" charset="-78"/>
+                <a:ea typeface="Amiri" pitchFamily="2" charset="-78"/>
                 <a:cs typeface="Amiri" pitchFamily="2" charset="-78"/>
               </a:rPr>
               <a:t>أُفَضِّلُ الطَّبِيعَةَ، لِأَنَّ الهَوَاءَ أَنْظَفُ، وَالمَكَانَ أَهْدَأُ مِنَ المَدِينَةِ.</a:t>
@@ -24623,6 +24801,7 @@
                   <a:srgbClr val="1B3B6F"/>
                 </a:solidFill>
                 <a:latin typeface="Amiri" pitchFamily="2" charset="-78"/>
+                <a:ea typeface="Amiri" pitchFamily="2" charset="-78"/>
                 <a:cs typeface="Amiri" pitchFamily="2" charset="-78"/>
               </a:rPr>
               <a:t>هَلْ تُفَضِّلُ النُّزْهَةَ فِي المَدِينَةِ أَمْ فِي الطَّبِيعَةِ؟</a:t>
@@ -24726,6 +24905,7 @@
                   <a:srgbClr val="1B3B6F"/>
                 </a:solidFill>
                 <a:latin typeface="Amiri" pitchFamily="2" charset="-78"/>
+                <a:ea typeface="Amiri" pitchFamily="2" charset="-78"/>
                 <a:cs typeface="Amiri" pitchFamily="2" charset="-78"/>
               </a:rPr>
               <a:t>لِأَنَّنَا نَمْشِي وَنَتَنَفَّسُ هَوَاءً نَقِيًّا، وَنَنْسَى ضَغْطَ الدِّرَاسَةِ قَلِيلًا.</a:t>
@@ -24802,6 +24982,7 @@
                   <a:srgbClr val="1B3B6F"/>
                 </a:solidFill>
                 <a:latin typeface="Amiri" pitchFamily="2" charset="-78"/>
+                <a:ea typeface="Amiri" pitchFamily="2" charset="-78"/>
                 <a:cs typeface="Amiri" pitchFamily="2" charset="-78"/>
               </a:rPr>
               <a:t>لِمَاذَا النُّزُهَاتُ مُفِيدَةٌ لِلصِّحَّةِ؟</a:t>
@@ -24905,6 +25086,7 @@
                   <a:srgbClr val="1B3B6F"/>
                 </a:solidFill>
                 <a:latin typeface="Amiri" pitchFamily="2" charset="-78"/>
+                <a:ea typeface="Amiri" pitchFamily="2" charset="-78"/>
                 <a:cs typeface="Amiri" pitchFamily="2" charset="-78"/>
               </a:rPr>
               <a:t>سَأَزُورُ المُتْحَفَ الجَدِيدَ مَعَ أَصْدِقَائِي، ثُمَّ سَنَأْكُلُ البِيتْزَا فِي المَسَاءِ.</a:t>
@@ -24981,6 +25163,7 @@
                   <a:srgbClr val="1B3B6F"/>
                 </a:solidFill>
                 <a:latin typeface="Amiri" pitchFamily="2" charset="-78"/>
+                <a:ea typeface="Amiri" pitchFamily="2" charset="-78"/>
                 <a:cs typeface="Amiri" pitchFamily="2" charset="-78"/>
               </a:rPr>
               <a:t>مَا خُطَطُكَ لِنِهَايَةِ الأُسْبُوعِ القَادِمِ؟</a:t>
@@ -25190,6 +25373,7 @@
                   <a:srgbClr val="D4AF37"/>
                 </a:solidFill>
                 <a:latin typeface="Amiri" pitchFamily="2" charset="-78"/>
+                <a:ea typeface="Amiri" pitchFamily="2" charset="-78"/>
                 <a:cs typeface="Amiri" pitchFamily="2" charset="-78"/>
               </a:rPr>
               <a:t>م</a:t>
@@ -25510,6 +25694,7 @@
                   <a:srgbClr val="8A6D1E"/>
                 </a:solidFill>
                 <a:latin typeface="Amiri" pitchFamily="2" charset="-78"/>
+                <a:ea typeface="Amiri" pitchFamily="2" charset="-78"/>
                 <a:cs typeface="Amiri" pitchFamily="2" charset="-78"/>
               </a:rPr>
               <a:t>نَمُوذَجُ الإِجَابَةِ</a:t>
@@ -25752,6 +25937,7 @@
                   <a:srgbClr val="1B3B6F"/>
                 </a:solidFill>
                 <a:latin typeface="Amiri" pitchFamily="2" charset="-78"/>
+                <a:ea typeface="Amiri" pitchFamily="2" charset="-78"/>
                 <a:cs typeface="Amiri" pitchFamily="2" charset="-78"/>
               </a:rPr>
               <a:t>لَا أَظُنُّ ذٰلِكَ، لِأَنَّ كُلَّ وَاحِدٍ مَشْغُولٌ بِهَاتِفِهِ، حَتَّى عِنْدَمَا يَجْلِسُونَ مَعًا.</a:t>
@@ -25828,6 +26014,7 @@
                   <a:srgbClr val="1B3B6F"/>
                 </a:solidFill>
                 <a:latin typeface="Amiri" pitchFamily="2" charset="-78"/>
+                <a:ea typeface="Amiri" pitchFamily="2" charset="-78"/>
                 <a:cs typeface="Amiri" pitchFamily="2" charset="-78"/>
               </a:rPr>
               <a:t>هَلْ يَقْضِي الشَّبَابُ وَقْتًا كَافِيًا مَعَ أُسَرِهِمْ؟</a:t>
@@ -25931,6 +26118,7 @@
                   <a:srgbClr val="1B3B6F"/>
                 </a:solidFill>
                 <a:latin typeface="Amiri" pitchFamily="2" charset="-78"/>
+                <a:ea typeface="Amiri" pitchFamily="2" charset="-78"/>
                 <a:cs typeface="Amiri" pitchFamily="2" charset="-78"/>
               </a:rPr>
               <a:t>كَانَ أَبِي يَقْضِي عُطْلَتَهُ فِي اللَّعِبِ فِي الحَيِّ، أَمَّا أَنَا فَأَقْضِي جُزْءًا كَبِيرًا مِنْهَا فِي الدُّرُوسِ الإِضَافِيَّةِ.</a:t>
@@ -26010,6 +26198,7 @@
                   <a:srgbClr val="1B3B6F"/>
                 </a:solidFill>
                 <a:latin typeface="Amiri" pitchFamily="2" charset="-78"/>
+                <a:ea typeface="Amiri" pitchFamily="2" charset="-78"/>
                 <a:cs typeface="Amiri" pitchFamily="2" charset="-78"/>
               </a:rPr>
               <a:t>مَا الفَرْقُ بَيْنَ عُطْلَةِ نِهَايَةِ الأُسْبُوعِ عِنْدَكَ وَعِنْدَ وَالِدَيْكَ عِنْدَمَا كَانَا صَغِيرَيْنِ؟</a:t>
@@ -26113,6 +26302,7 @@
                   <a:srgbClr val="1B3B6F"/>
                 </a:solidFill>
                 <a:latin typeface="Amiri" pitchFamily="2" charset="-78"/>
+                <a:ea typeface="Amiri" pitchFamily="2" charset="-78"/>
                 <a:cs typeface="Amiri" pitchFamily="2" charset="-78"/>
               </a:rPr>
               <a:t>صَحِيحٌ أَنَّ المَتَاحِفَ تَحْتَاجُ إِلَى المَالِ، غَيْرَ أَنَّ الثَّقَافَةَ يَجِبُ أَنْ تَكُونَ لِلْجَمِيعِ، لَا لِلْأَغْنِيَاءِ فَقَطْ.</a:t>
@@ -26189,6 +26379,7 @@
                   <a:srgbClr val="1B3B6F"/>
                 </a:solidFill>
                 <a:latin typeface="Amiri" pitchFamily="2" charset="-78"/>
+                <a:ea typeface="Amiri" pitchFamily="2" charset="-78"/>
                 <a:cs typeface="Amiri" pitchFamily="2" charset="-78"/>
               </a:rPr>
               <a:t>هَلْ يَجِبُ أَنْ تَكُونَ المَتَاحِفُ مَجَّانِيَّةً؟</a:t>
@@ -26398,6 +26589,7 @@
                   <a:srgbClr val="D4AF37"/>
                 </a:solidFill>
                 <a:latin typeface="Amiri" pitchFamily="2" charset="-78"/>
+                <a:ea typeface="Amiri" pitchFamily="2" charset="-78"/>
                 <a:cs typeface="Amiri" pitchFamily="2" charset="-78"/>
               </a:rPr>
               <a:t>م</a:t>
@@ -26718,6 +26910,7 @@
                   <a:srgbClr val="8A6D1E"/>
                 </a:solidFill>
                 <a:latin typeface="Amiri" pitchFamily="2" charset="-78"/>
+                <a:ea typeface="Amiri" pitchFamily="2" charset="-78"/>
                 <a:cs typeface="Amiri" pitchFamily="2" charset="-78"/>
               </a:rPr>
               <a:t>نَمُوذَجُ الإِجَابَةِ</a:t>
@@ -26960,6 +27153,7 @@
                   <a:srgbClr val="1B3B6F"/>
                 </a:solidFill>
                 <a:latin typeface="Amiri" pitchFamily="2" charset="-78"/>
+                <a:ea typeface="Amiri" pitchFamily="2" charset="-78"/>
                 <a:cs typeface="Amiri" pitchFamily="2" charset="-78"/>
               </a:rPr>
               <a:t>أَجْمَلُ مَكَانٍ زُرْتُهُ هُوَ وَادِي رَمٍّ، لِأَنَّ الصَّحْرَاءَ هُنَاكَ حَمْرَاءُ، وَالنُّجُومَ فِي اللَّيْلِ لَا تُصَدَّقُ.</a:t>
@@ -27036,6 +27230,7 @@
                   <a:srgbClr val="1B3B6F"/>
                 </a:solidFill>
                 <a:latin typeface="Amiri" pitchFamily="2" charset="-78"/>
+                <a:ea typeface="Amiri" pitchFamily="2" charset="-78"/>
                 <a:cs typeface="Amiri" pitchFamily="2" charset="-78"/>
               </a:rPr>
               <a:t>مَا أَجْمَلُ مَكَانٍ زُرْتَهُ؟ وَلِمَاذَا؟</a:t>
@@ -27139,6 +27334,7 @@
                   <a:srgbClr val="1B3B6F"/>
                 </a:solidFill>
                 <a:latin typeface="Amiri" pitchFamily="2" charset="-78"/>
+                <a:ea typeface="Amiri" pitchFamily="2" charset="-78"/>
                 <a:cs typeface="Amiri" pitchFamily="2" charset="-78"/>
               </a:rPr>
               <a:t>لَوْ نَظَّمْتُ يَوْمًا مِثَالِيًّا، لَبَدَأْنَا بِالمَشْيِ فِي الجَبَلِ، ثُمَّ تَغَدَّيْنَا عَلَى الشَّاطِئِ، وَخَتَمْنَا بِمُبَارَاةٍ.</a:t>
@@ -27215,6 +27411,7 @@
                   <a:srgbClr val="1B3B6F"/>
                 </a:solidFill>
                 <a:latin typeface="Amiri" pitchFamily="2" charset="-78"/>
+                <a:ea typeface="Amiri" pitchFamily="2" charset="-78"/>
                 <a:cs typeface="Amiri" pitchFamily="2" charset="-78"/>
               </a:rPr>
               <a:t>لَوْ نَظَّمْتَ يَوْمًا مِثَالِيًّا لِصَفِّكَ، كَيْفَ يَكُونُ؟</a:t>
@@ -27424,6 +27621,7 @@
                   <a:srgbClr val="D4AF37"/>
                 </a:solidFill>
                 <a:latin typeface="Amiri" pitchFamily="2" charset="-78"/>
+                <a:ea typeface="Amiri" pitchFamily="2" charset="-78"/>
                 <a:cs typeface="Amiri" pitchFamily="2" charset="-78"/>
               </a:rPr>
               <a:t>م</a:t>
@@ -27744,6 +27942,7 @@
                   <a:srgbClr val="8A6D1E"/>
                 </a:solidFill>
                 <a:latin typeface="Amiri" pitchFamily="2" charset="-78"/>
+                <a:ea typeface="Amiri" pitchFamily="2" charset="-78"/>
                 <a:cs typeface="Amiri" pitchFamily="2" charset="-78"/>
               </a:rPr>
               <a:t>قَيِّمْ عَمَلَكَ</a:t>
@@ -28988,6 +29187,7 @@
                   <a:srgbClr val="FFFFFF"/>
                 </a:solidFill>
                 <a:latin typeface="Amiri" pitchFamily="2" charset="-78"/>
+                <a:ea typeface="Amiri" pitchFamily="2" charset="-78"/>
                 <a:cs typeface="Amiri" pitchFamily="2" charset="-78"/>
               </a:rPr>
               <a:t>أَحْسَنْتُمْ! إِلَى اللِّقَاءِ</a:t>
@@ -29140,6 +29340,7 @@
                   <a:srgbClr val="D4AF37"/>
                 </a:solidFill>
                 <a:latin typeface="Amiri" pitchFamily="2" charset="-78"/>
+                <a:ea typeface="Amiri" pitchFamily="2" charset="-78"/>
                 <a:cs typeface="Amiri" pitchFamily="2" charset="-78"/>
               </a:rPr>
               <a:t>وَرْشَةُ الكِتَابَةِ</a:t>
@@ -29273,6 +29474,7 @@
                   <a:srgbClr val="D4AF37"/>
                 </a:solidFill>
                 <a:latin typeface="Amiri" pitchFamily="2" charset="-78"/>
+                <a:ea typeface="Amiri" pitchFamily="2" charset="-78"/>
                 <a:cs typeface="Amiri" pitchFamily="2" charset="-78"/>
               </a:rPr>
               <a:t>م</a:t>
@@ -29593,6 +29795,7 @@
                   <a:srgbClr val="8A6D1E"/>
                 </a:solidFill>
                 <a:latin typeface="Amiri" pitchFamily="2" charset="-78"/>
+                <a:ea typeface="Amiri" pitchFamily="2" charset="-78"/>
                 <a:cs typeface="Amiri" pitchFamily="2" charset="-78"/>
               </a:rPr>
               <a:t>خَرِيطَةُ الوَرْشَةِ</a:t>
@@ -29907,6 +30110,7 @@
                   <a:srgbClr val="1B3B6F"/>
                 </a:solidFill>
                 <a:latin typeface="Amiri" pitchFamily="2" charset="-78"/>
+                <a:ea typeface="Amiri" pitchFamily="2" charset="-78"/>
                 <a:cs typeface="Amiri" pitchFamily="2" charset="-78"/>
               </a:rPr>
               <a:t>كَيْفَ</a:t>
@@ -30183,6 +30387,7 @@
                   <a:srgbClr val="1E6B52"/>
                 </a:solidFill>
                 <a:latin typeface="Amiri" pitchFamily="2" charset="-78"/>
+                <a:ea typeface="Amiri" pitchFamily="2" charset="-78"/>
                 <a:cs typeface="Amiri" pitchFamily="2" charset="-78"/>
               </a:rPr>
               <a:t>تَمْثِيلُ الدَّوْرِ</a:t>
@@ -30459,6 +30664,7 @@
                   <a:srgbClr val="8A6D1E"/>
                 </a:solidFill>
                 <a:latin typeface="Amiri" pitchFamily="2" charset="-78"/>
+                <a:ea typeface="Amiri" pitchFamily="2" charset="-78"/>
                 <a:cs typeface="Amiri" pitchFamily="2" charset="-78"/>
               </a:rPr>
               <a:t>النَّمُوذَجُ</a:t>
@@ -30735,6 +30941,7 @@
                   <a:srgbClr val="1E6B52"/>
                 </a:solidFill>
                 <a:latin typeface="Amiri" pitchFamily="2" charset="-78"/>
+                <a:ea typeface="Amiri" pitchFamily="2" charset="-78"/>
                 <a:cs typeface="Amiri" pitchFamily="2" charset="-78"/>
               </a:rPr>
               <a:t>المُحَادَثَةُ</a:t>
@@ -31011,6 +31218,7 @@
                   <a:srgbClr val="8A6D1E"/>
                 </a:solidFill>
                 <a:latin typeface="Amiri" pitchFamily="2" charset="-78"/>
+                <a:ea typeface="Amiri" pitchFamily="2" charset="-78"/>
                 <a:cs typeface="Amiri" pitchFamily="2" charset="-78"/>
               </a:rPr>
               <a:t>قَيِّمْ</a:t>
@@ -31254,6 +31462,7 @@
                   <a:srgbClr val="D4AF37"/>
                 </a:solidFill>
                 <a:latin typeface="Amiri" pitchFamily="2" charset="-78"/>
+                <a:ea typeface="Amiri" pitchFamily="2" charset="-78"/>
                 <a:cs typeface="Amiri" pitchFamily="2" charset="-78"/>
               </a:rPr>
               <a:t>م</a:t>
@@ -31574,6 +31783,7 @@
                   <a:srgbClr val="8A6D1E"/>
                 </a:solidFill>
                 <a:latin typeface="Amiri" pitchFamily="2" charset="-78"/>
+                <a:ea typeface="Amiri" pitchFamily="2" charset="-78"/>
                 <a:cs typeface="Amiri" pitchFamily="2" charset="-78"/>
               </a:rPr>
               <a:t>امْتِحَانُ التَّحَدُّثِ</a:t>
@@ -32198,6 +32408,7 @@
                   <a:srgbClr val="1B3B6F"/>
                 </a:solidFill>
                 <a:latin typeface="Amiri" pitchFamily="2" charset="-78"/>
+                <a:ea typeface="Amiri" pitchFamily="2" charset="-78"/>
                 <a:cs typeface="Amiri" pitchFamily="2" charset="-78"/>
               </a:rPr>
               <a:t>عَفْوًا، هَلْ يُمْكِنُ أَنْ تُعِيدَ السُّؤَالَ؟</a:t>
@@ -32297,6 +32508,7 @@
                   <a:srgbClr val="1B3B6F"/>
                 </a:solidFill>
                 <a:latin typeface="Amiri" pitchFamily="2" charset="-78"/>
+                <a:ea typeface="Amiri" pitchFamily="2" charset="-78"/>
                 <a:cs typeface="Amiri" pitchFamily="2" charset="-78"/>
               </a:rPr>
               <a:t>لَحْظَةً، دَعْنِي أُفَكِّرُ …</a:t>
@@ -32396,6 +32608,7 @@
                   <a:srgbClr val="1B3B6F"/>
                 </a:solidFill>
                 <a:latin typeface="Amiri" pitchFamily="2" charset="-78"/>
+                <a:ea typeface="Amiri" pitchFamily="2" charset="-78"/>
                 <a:cs typeface="Amiri" pitchFamily="2" charset="-78"/>
               </a:rPr>
               <a:t>أَقْصِدُ …</a:t>
@@ -32567,6 +32780,7 @@
                   <a:srgbClr val="D4AF37"/>
                 </a:solidFill>
                 <a:latin typeface="Amiri" pitchFamily="2" charset="-78"/>
+                <a:ea typeface="Amiri" pitchFamily="2" charset="-78"/>
                 <a:cs typeface="Amiri" pitchFamily="2" charset="-78"/>
               </a:rPr>
               <a:t>م</a:t>
@@ -32887,6 +33101,7 @@
                   <a:srgbClr val="8A6D1E"/>
                 </a:solidFill>
                 <a:latin typeface="Amiri" pitchFamily="2" charset="-78"/>
+                <a:ea typeface="Amiri" pitchFamily="2" charset="-78"/>
                 <a:cs typeface="Amiri" pitchFamily="2" charset="-78"/>
               </a:rPr>
               <a:t>خَطِّطْ وَتَحَدَّثْ</a:t>
@@ -33190,6 +33405,7 @@
                   <a:srgbClr val="1B3B6F"/>
                 </a:solidFill>
                 <a:latin typeface="Amiri" pitchFamily="2" charset="-78"/>
+                <a:ea typeface="Amiri" pitchFamily="2" charset="-78"/>
                 <a:cs typeface="Amiri" pitchFamily="2" charset="-78"/>
               </a:rPr>
               <a:t>نُزْهَةٌ</a:t>
@@ -33347,6 +33563,7 @@
                   <a:srgbClr val="1B3B6F"/>
                 </a:solidFill>
                 <a:latin typeface="Amiri" pitchFamily="2" charset="-78"/>
+                <a:ea typeface="Amiri" pitchFamily="2" charset="-78"/>
                 <a:cs typeface="Amiri" pitchFamily="2" charset="-78"/>
               </a:rPr>
               <a:t>نُزُهَاتٌ</a:t>
@@ -33450,6 +33667,7 @@
                   <a:srgbClr val="1B3B6F"/>
                 </a:solidFill>
                 <a:latin typeface="Amiri" pitchFamily="2" charset="-78"/>
+                <a:ea typeface="Amiri" pitchFamily="2" charset="-78"/>
                 <a:cs typeface="Amiri" pitchFamily="2" charset="-78"/>
               </a:rPr>
               <a:t>نُزْهَةٌ</a:t>
@@ -33715,6 +33933,7 @@
                   <a:srgbClr val="1B3B6F"/>
                 </a:solidFill>
                 <a:latin typeface="Amiri" pitchFamily="2" charset="-78"/>
+                <a:ea typeface="Amiri" pitchFamily="2" charset="-78"/>
                 <a:cs typeface="Amiri" pitchFamily="2" charset="-78"/>
               </a:rPr>
               <a:t>نَخْرُجُ</a:t>
@@ -33872,6 +34091,7 @@
                   <a:srgbClr val="1B3B6F"/>
                 </a:solidFill>
                 <a:latin typeface="Amiri" pitchFamily="2" charset="-78"/>
+                <a:ea typeface="Amiri" pitchFamily="2" charset="-78"/>
                 <a:cs typeface="Amiri" pitchFamily="2" charset="-78"/>
               </a:rPr>
               <a:t>يَخْرُجُونَ</a:t>
@@ -33975,6 +34195,7 @@
                   <a:srgbClr val="1B3B6F"/>
                 </a:solidFill>
                 <a:latin typeface="Amiri" pitchFamily="2" charset="-78"/>
+                <a:ea typeface="Amiri" pitchFamily="2" charset="-78"/>
                 <a:cs typeface="Amiri" pitchFamily="2" charset="-78"/>
               </a:rPr>
               <a:t>يَخْرُجُ</a:t>
@@ -34078,6 +34299,7 @@
                   <a:srgbClr val="1B3B6F"/>
                 </a:solidFill>
                 <a:latin typeface="Amiri" pitchFamily="2" charset="-78"/>
+                <a:ea typeface="Amiri" pitchFamily="2" charset="-78"/>
                 <a:cs typeface="Amiri" pitchFamily="2" charset="-78"/>
               </a:rPr>
               <a:t>أَخْرُجُ</a:t>
@@ -34343,6 +34565,7 @@
                   <a:srgbClr val="1B3B6F"/>
                 </a:solidFill>
                 <a:latin typeface="Amiri" pitchFamily="2" charset="-78"/>
+                <a:ea typeface="Amiri" pitchFamily="2" charset="-78"/>
                 <a:cs typeface="Amiri" pitchFamily="2" charset="-78"/>
               </a:rPr>
               <a:t>قَضَيْتُ</a:t>
@@ -34500,6 +34723,7 @@
                   <a:srgbClr val="1B3B6F"/>
                 </a:solidFill>
                 <a:latin typeface="Amiri" pitchFamily="2" charset="-78"/>
+                <a:ea typeface="Amiri" pitchFamily="2" charset="-78"/>
                 <a:cs typeface="Amiri" pitchFamily="2" charset="-78"/>
               </a:rPr>
               <a:t>قَضَيْنَا</a:t>
@@ -34603,6 +34827,7 @@
                   <a:srgbClr val="1B3B6F"/>
                 </a:solidFill>
                 <a:latin typeface="Amiri" pitchFamily="2" charset="-78"/>
+                <a:ea typeface="Amiri" pitchFamily="2" charset="-78"/>
                 <a:cs typeface="Amiri" pitchFamily="2" charset="-78"/>
               </a:rPr>
               <a:t>قَضَتْ</a:t>
@@ -34706,6 +34931,7 @@
                   <a:srgbClr val="1B3B6F"/>
                 </a:solidFill>
                 <a:latin typeface="Amiri" pitchFamily="2" charset="-78"/>
+                <a:ea typeface="Amiri" pitchFamily="2" charset="-78"/>
                 <a:cs typeface="Amiri" pitchFamily="2" charset="-78"/>
               </a:rPr>
               <a:t>قَضَى</a:t>
@@ -34971,6 +35197,7 @@
                   <a:srgbClr val="1B3B6F"/>
                 </a:solidFill>
                 <a:latin typeface="Amiri" pitchFamily="2" charset="-78"/>
+                <a:ea typeface="Amiri" pitchFamily="2" charset="-78"/>
                 <a:cs typeface="Amiri" pitchFamily="2" charset="-78"/>
               </a:rPr>
               <a:t>سَنَزُورُ</a:t>
@@ -35128,6 +35355,7 @@
                   <a:srgbClr val="1B3B6F"/>
                 </a:solidFill>
                 <a:latin typeface="Amiri" pitchFamily="2" charset="-78"/>
+                <a:ea typeface="Amiri" pitchFamily="2" charset="-78"/>
                 <a:cs typeface="Amiri" pitchFamily="2" charset="-78"/>
               </a:rPr>
               <a:t>سَيَزُورُونَ</a:t>
@@ -35231,6 +35459,7 @@
                   <a:srgbClr val="1B3B6F"/>
                 </a:solidFill>
                 <a:latin typeface="Amiri" pitchFamily="2" charset="-78"/>
+                <a:ea typeface="Amiri" pitchFamily="2" charset="-78"/>
                 <a:cs typeface="Amiri" pitchFamily="2" charset="-78"/>
               </a:rPr>
               <a:t>سَيَزُورُ</a:t>
@@ -35334,6 +35563,7 @@
                   <a:srgbClr val="1B3B6F"/>
                 </a:solidFill>
                 <a:latin typeface="Amiri" pitchFamily="2" charset="-78"/>
+                <a:ea typeface="Amiri" pitchFamily="2" charset="-78"/>
                 <a:cs typeface="Amiri" pitchFamily="2" charset="-78"/>
               </a:rPr>
               <a:t>سَأَزُورُ</a:t>
@@ -35599,6 +35829,7 @@
                   <a:srgbClr val="1B3B6F"/>
                 </a:solidFill>
                 <a:latin typeface="Amiri" pitchFamily="2" charset="-78"/>
+                <a:ea typeface="Amiri" pitchFamily="2" charset="-78"/>
                 <a:cs typeface="Amiri" pitchFamily="2" charset="-78"/>
               </a:rPr>
               <a:t>نَتَّفِقُ عَلَى …</a:t>
@@ -35756,6 +35987,7 @@
                   <a:srgbClr val="1B3B6F"/>
                 </a:solidFill>
                 <a:latin typeface="Amiri" pitchFamily="2" charset="-78"/>
+                <a:ea typeface="Amiri" pitchFamily="2" charset="-78"/>
                 <a:cs typeface="Amiri" pitchFamily="2" charset="-78"/>
               </a:rPr>
               <a:t>يَتَّفِقُونَ</a:t>
@@ -35859,6 +36091,7 @@
                   <a:srgbClr val="1B3B6F"/>
                 </a:solidFill>
                 <a:latin typeface="Amiri" pitchFamily="2" charset="-78"/>
+                <a:ea typeface="Amiri" pitchFamily="2" charset="-78"/>
                 <a:cs typeface="Amiri" pitchFamily="2" charset="-78"/>
               </a:rPr>
               <a:t>يَتَّفِقُ</a:t>
@@ -35962,6 +36195,7 @@
                   <a:srgbClr val="1B3B6F"/>
                 </a:solidFill>
                 <a:latin typeface="Amiri" pitchFamily="2" charset="-78"/>
+                <a:ea typeface="Amiri" pitchFamily="2" charset="-78"/>
                 <a:cs typeface="Amiri" pitchFamily="2" charset="-78"/>
               </a:rPr>
               <a:t>أَتَّفِقُ</a:t>
@@ -36227,6 +36461,7 @@
                   <a:srgbClr val="1B3B6F"/>
                 </a:solidFill>
                 <a:latin typeface="Amiri" pitchFamily="2" charset="-78"/>
+                <a:ea typeface="Amiri" pitchFamily="2" charset="-78"/>
                 <a:cs typeface="Amiri" pitchFamily="2" charset="-78"/>
               </a:rPr>
               <a:t>حَدِيقَةٌ · شَاطِئٌ · مُتْحَفٌ</a:t>
@@ -36384,6 +36619,7 @@
                   <a:srgbClr val="1B3B6F"/>
                 </a:solidFill>
                 <a:latin typeface="Amiri" pitchFamily="2" charset="-78"/>
+                <a:ea typeface="Amiri" pitchFamily="2" charset="-78"/>
                 <a:cs typeface="Amiri" pitchFamily="2" charset="-78"/>
               </a:rPr>
               <a:t>حَدَائِقُ · شَوَاطِئُ · مَتَاحِفُ</a:t>
@@ -36517,6 +36753,7 @@
                   <a:srgbClr val="D4AF37"/>
                 </a:solidFill>
                 <a:latin typeface="Amiri" pitchFamily="2" charset="-78"/>
+                <a:ea typeface="Amiri" pitchFamily="2" charset="-78"/>
                 <a:cs typeface="Amiri" pitchFamily="2" charset="-78"/>
               </a:rPr>
               <a:t>م</a:t>
@@ -36837,6 +37074,7 @@
                   <a:srgbClr val="8A6D1E"/>
                 </a:solidFill>
                 <a:latin typeface="Amiri" pitchFamily="2" charset="-78"/>
+                <a:ea typeface="Amiri" pitchFamily="2" charset="-78"/>
                 <a:cs typeface="Amiri" pitchFamily="2" charset="-78"/>
               </a:rPr>
               <a:t>أَيْنَ نَذْهَبُ؟</a:t>
@@ -37140,6 +37378,7 @@
                   <a:srgbClr val="1B3B6F"/>
                 </a:solidFill>
                 <a:latin typeface="Amiri" pitchFamily="2" charset="-78"/>
+                <a:ea typeface="Amiri" pitchFamily="2" charset="-78"/>
                 <a:cs typeface="Amiri" pitchFamily="2" charset="-78"/>
               </a:rPr>
               <a:t>مُمْتِعٌ</a:t>
@@ -37297,6 +37536,7 @@
                   <a:srgbClr val="1B3B6F"/>
                 </a:solidFill>
                 <a:latin typeface="Amiri" pitchFamily="2" charset="-78"/>
+                <a:ea typeface="Amiri" pitchFamily="2" charset="-78"/>
                 <a:cs typeface="Amiri" pitchFamily="2" charset="-78"/>
               </a:rPr>
               <a:t>أَمْتَعُ</a:t>
@@ -37400,6 +37640,7 @@
                   <a:srgbClr val="1B3B6F"/>
                 </a:solidFill>
                 <a:latin typeface="Amiri" pitchFamily="2" charset="-78"/>
+                <a:ea typeface="Amiri" pitchFamily="2" charset="-78"/>
                 <a:cs typeface="Amiri" pitchFamily="2" charset="-78"/>
               </a:rPr>
               <a:t>مُمْتِعَةٌ</a:t>
@@ -37503,6 +37744,7 @@
                   <a:srgbClr val="1B3B6F"/>
                 </a:solidFill>
                 <a:latin typeface="Amiri" pitchFamily="2" charset="-78"/>
+                <a:ea typeface="Amiri" pitchFamily="2" charset="-78"/>
                 <a:cs typeface="Amiri" pitchFamily="2" charset="-78"/>
               </a:rPr>
               <a:t>مُمْتِعٌ</a:t>
@@ -37768,6 +38010,7 @@
                   <a:srgbClr val="1B3B6F"/>
                 </a:solidFill>
                 <a:latin typeface="Amiri" pitchFamily="2" charset="-78"/>
+                <a:ea typeface="Amiri" pitchFamily="2" charset="-78"/>
                 <a:cs typeface="Amiri" pitchFamily="2" charset="-78"/>
               </a:rPr>
               <a:t>مُتْعِبٌ</a:t>
@@ -37925,6 +38168,7 @@
                   <a:srgbClr val="1B3B6F"/>
                 </a:solidFill>
                 <a:latin typeface="Amiri" pitchFamily="2" charset="-78"/>
+                <a:ea typeface="Amiri" pitchFamily="2" charset="-78"/>
                 <a:cs typeface="Amiri" pitchFamily="2" charset="-78"/>
               </a:rPr>
               <a:t>أَكْثَرُ تَعَبًا</a:t>
@@ -38028,6 +38272,7 @@
                   <a:srgbClr val="1B3B6F"/>
                 </a:solidFill>
                 <a:latin typeface="Amiri" pitchFamily="2" charset="-78"/>
+                <a:ea typeface="Amiri" pitchFamily="2" charset="-78"/>
                 <a:cs typeface="Amiri" pitchFamily="2" charset="-78"/>
               </a:rPr>
               <a:t>مُتْعِبَةٌ</a:t>
@@ -38131,6 +38376,7 @@
                   <a:srgbClr val="1B3B6F"/>
                 </a:solidFill>
                 <a:latin typeface="Amiri" pitchFamily="2" charset="-78"/>
+                <a:ea typeface="Amiri" pitchFamily="2" charset="-78"/>
                 <a:cs typeface="Amiri" pitchFamily="2" charset="-78"/>
               </a:rPr>
               <a:t>مُتْعِبٌ</a:t>
@@ -38396,6 +38642,7 @@
                   <a:srgbClr val="1B3B6F"/>
                 </a:solidFill>
                 <a:latin typeface="Amiri" pitchFamily="2" charset="-78"/>
+                <a:ea typeface="Amiri" pitchFamily="2" charset="-78"/>
                 <a:cs typeface="Amiri" pitchFamily="2" charset="-78"/>
               </a:rPr>
               <a:t>مُتَحَمِّسٌ</a:t>
@@ -38553,6 +38800,7 @@
                   <a:srgbClr val="1B3B6F"/>
                 </a:solidFill>
                 <a:latin typeface="Amiri" pitchFamily="2" charset="-78"/>
+                <a:ea typeface="Amiri" pitchFamily="2" charset="-78"/>
                 <a:cs typeface="Amiri" pitchFamily="2" charset="-78"/>
               </a:rPr>
               <a:t>مُتَحَمِّسُونَ</a:t>
@@ -38656,6 +38904,7 @@
                   <a:srgbClr val="1B3B6F"/>
                 </a:solidFill>
                 <a:latin typeface="Amiri" pitchFamily="2" charset="-78"/>
+                <a:ea typeface="Amiri" pitchFamily="2" charset="-78"/>
                 <a:cs typeface="Amiri" pitchFamily="2" charset="-78"/>
               </a:rPr>
               <a:t>مُتَحَمِّسَةٌ</a:t>
@@ -38759,6 +39008,7 @@
                   <a:srgbClr val="1B3B6F"/>
                 </a:solidFill>
                 <a:latin typeface="Amiri" pitchFamily="2" charset="-78"/>
+                <a:ea typeface="Amiri" pitchFamily="2" charset="-78"/>
                 <a:cs typeface="Amiri" pitchFamily="2" charset="-78"/>
               </a:rPr>
               <a:t>مُتَحَمِّسٌ</a:t>
@@ -39024,6 +39274,7 @@
                   <a:srgbClr val="1B3B6F"/>
                 </a:solidFill>
                 <a:latin typeface="Amiri" pitchFamily="2" charset="-78"/>
+                <a:ea typeface="Amiri" pitchFamily="2" charset="-78"/>
                 <a:cs typeface="Amiri" pitchFamily="2" charset="-78"/>
               </a:rPr>
               <a:t>نُزْهَةُ طَعَامٍ</a:t>
@@ -39343,6 +39594,7 @@
                   <a:srgbClr val="1B3B6F"/>
                 </a:solidFill>
                 <a:latin typeface="Amiri" pitchFamily="2" charset="-78"/>
+                <a:ea typeface="Amiri" pitchFamily="2" charset="-78"/>
                 <a:cs typeface="Amiri" pitchFamily="2" charset="-78"/>
               </a:rPr>
               <a:t>مَا رَأْيُكَ أَنْ …؟</a:t>
@@ -39500,6 +39752,7 @@
                   <a:srgbClr val="1B3B6F"/>
                 </a:solidFill>
                 <a:latin typeface="Amiri" pitchFamily="2" charset="-78"/>
+                <a:ea typeface="Amiri" pitchFamily="2" charset="-78"/>
                 <a:cs typeface="Amiri" pitchFamily="2" charset="-78"/>
               </a:rPr>
               <a:t>مَا رَأْيُكُمْ</a:t>
@@ -39603,6 +39856,7 @@
                   <a:srgbClr val="1B3B6F"/>
                 </a:solidFill>
                 <a:latin typeface="Amiri" pitchFamily="2" charset="-78"/>
+                <a:ea typeface="Amiri" pitchFamily="2" charset="-78"/>
                 <a:cs typeface="Amiri" pitchFamily="2" charset="-78"/>
               </a:rPr>
               <a:t>مَا رَأْيُكِ</a:t>
@@ -39868,6 +40122,7 @@
                   <a:srgbClr val="1B3B6F"/>
                 </a:solidFill>
                 <a:latin typeface="Amiri" pitchFamily="2" charset="-78"/>
+                <a:ea typeface="Amiri" pitchFamily="2" charset="-78"/>
                 <a:cs typeface="Amiri" pitchFamily="2" charset="-78"/>
               </a:rPr>
               <a:t>فِكْرَةٌ رَائِعَةٌ!</a:t>
@@ -40055,6 +40310,7 @@
                   <a:srgbClr val="D4AF37"/>
                 </a:solidFill>
                 <a:latin typeface="Amiri" pitchFamily="2" charset="-78"/>
+                <a:ea typeface="Amiri" pitchFamily="2" charset="-78"/>
                 <a:cs typeface="Amiri" pitchFamily="2" charset="-78"/>
               </a:rPr>
               <a:t>م</a:t>
@@ -40375,6 +40631,7 @@
                   <a:srgbClr val="8A6D1E"/>
                 </a:solidFill>
                 <a:latin typeface="Amiri" pitchFamily="2" charset="-78"/>
+                <a:ea typeface="Amiri" pitchFamily="2" charset="-78"/>
                 <a:cs typeface="Amiri" pitchFamily="2" charset="-78"/>
               </a:rPr>
               <a:t>فِي الغُرَفِ</a:t>
@@ -41551,6 +41808,7 @@
                   <a:srgbClr val="1B3B6F"/>
                 </a:solidFill>
                 <a:latin typeface="Amiri" pitchFamily="2" charset="-78"/>
+                <a:ea typeface="Amiri" pitchFamily="2" charset="-78"/>
                 <a:cs typeface="Amiri" pitchFamily="2" charset="-78"/>
               </a:rPr>
               <a:t>دَوْرُكَ!</a:t>
@@ -41627,6 +41885,7 @@
                   <a:srgbClr val="1B3B6F"/>
                 </a:solidFill>
                 <a:latin typeface="Amiri" pitchFamily="2" charset="-78"/>
+                <a:ea typeface="Amiri" pitchFamily="2" charset="-78"/>
                 <a:cs typeface="Amiri" pitchFamily="2" charset="-78"/>
               </a:rPr>
               <a:t>أَحْسَنْتَ! / أَحْسَنْتِ!</a:t>
@@ -41703,6 +41962,7 @@
                   <a:srgbClr val="1B3B6F"/>
                 </a:solidFill>
                 <a:latin typeface="Amiri" pitchFamily="2" charset="-78"/>
+                <a:ea typeface="Amiri" pitchFamily="2" charset="-78"/>
                 <a:cs typeface="Amiri" pitchFamily="2" charset="-78"/>
               </a:rPr>
               <a:t>تَكَلَّمْ أَكْثَرَ، مِنْ فَضْلِكَ</a:t>
@@ -41779,6 +42039,7 @@
                   <a:srgbClr val="1B3B6F"/>
                 </a:solidFill>
                 <a:latin typeface="Amiri" pitchFamily="2" charset="-78"/>
+                <a:ea typeface="Amiri" pitchFamily="2" charset="-78"/>
                 <a:cs typeface="Amiri" pitchFamily="2" charset="-78"/>
               </a:rPr>
               <a:t>لِمَاذَا؟</a:t>
@@ -41950,6 +42211,7 @@
                   <a:srgbClr val="D4AF37"/>
                 </a:solidFill>
                 <a:latin typeface="Amiri" pitchFamily="2" charset="-78"/>
+                <a:ea typeface="Amiri" pitchFamily="2" charset="-78"/>
                 <a:cs typeface="Amiri" pitchFamily="2" charset="-78"/>
               </a:rPr>
               <a:t>م</a:t>
@@ -42270,6 +42532,7 @@
                   <a:srgbClr val="8A6D1E"/>
                 </a:solidFill>
                 <a:latin typeface="Amiri" pitchFamily="2" charset="-78"/>
+                <a:ea typeface="Amiri" pitchFamily="2" charset="-78"/>
                 <a:cs typeface="Amiri" pitchFamily="2" charset="-78"/>
               </a:rPr>
               <a:t>نُخَطِّطُ لِيَوْمِ السَّبْتِ</a:t>
@@ -42550,6 +42813,7 @@
                   <a:srgbClr val="1B3B6F"/>
                 </a:solidFill>
                 <a:latin typeface="Amiri" pitchFamily="2" charset="-78"/>
+                <a:ea typeface="Amiri" pitchFamily="2" charset="-78"/>
                 <a:cs typeface="Amiri" pitchFamily="2" charset="-78"/>
               </a:rPr>
               <a:t>مَا رَأْيُكَ أَنْ نَذْهَبَ إِلَى …؟</a:t>
@@ -42626,6 +42890,7 @@
                   <a:srgbClr val="1B3B6F"/>
                 </a:solidFill>
                 <a:latin typeface="Amiri" pitchFamily="2" charset="-78"/>
+                <a:ea typeface="Amiri" pitchFamily="2" charset="-78"/>
                 <a:cs typeface="Amiri" pitchFamily="2" charset="-78"/>
               </a:rPr>
               <a:t>مَاذَا نَفْعَلُ يَوْمَ السَّبْتِ؟</a:t>
@@ -42794,6 +43059,7 @@
                   <a:srgbClr val="1B3B6F"/>
                 </a:solidFill>
                 <a:latin typeface="Amiri" pitchFamily="2" charset="-78"/>
+                <a:ea typeface="Amiri" pitchFamily="2" charset="-78"/>
                 <a:cs typeface="Amiri" pitchFamily="2" charset="-78"/>
               </a:rPr>
               <a:t>نَلْتَقِي فِي السَّاعَةِ … أَمَامَ …</a:t>
@@ -42870,6 +43136,7 @@
                   <a:srgbClr val="1B3B6F"/>
                 </a:solidFill>
                 <a:latin typeface="Amiri" pitchFamily="2" charset="-78"/>
+                <a:ea typeface="Amiri" pitchFamily="2" charset="-78"/>
                 <a:cs typeface="Amiri" pitchFamily="2" charset="-78"/>
               </a:rPr>
               <a:t>فِكْرَةٌ رَائِعَةٌ! مَتَى نَلْتَقِي؟</a:t>
@@ -43038,6 +43305,7 @@
                   <a:srgbClr val="1B3B6F"/>
                 </a:solidFill>
                 <a:latin typeface="Amiri" pitchFamily="2" charset="-78"/>
+                <a:ea typeface="Amiri" pitchFamily="2" charset="-78"/>
                 <a:cs typeface="Amiri" pitchFamily="2" charset="-78"/>
               </a:rPr>
               <a:t>نَذْهَبُ بِالحَافِلَةِ … لِأَنَّ …</a:t>
@@ -43114,6 +43382,7 @@
                   <a:srgbClr val="1B3B6F"/>
                 </a:solidFill>
                 <a:latin typeface="Amiri" pitchFamily="2" charset="-78"/>
+                <a:ea typeface="Amiri" pitchFamily="2" charset="-78"/>
                 <a:cs typeface="Amiri" pitchFamily="2" charset="-78"/>
               </a:rPr>
               <a:t>كَيْفَ نَذْهَبُ؟</a:t>
@@ -43282,6 +43551,7 @@
                   <a:srgbClr val="1B3B6F"/>
                 </a:solidFill>
                 <a:latin typeface="Amiri" pitchFamily="2" charset="-78"/>
+                <a:ea typeface="Amiri" pitchFamily="2" charset="-78"/>
                 <a:cs typeface="Amiri" pitchFamily="2" charset="-78"/>
               </a:rPr>
               <a:t>سَأُحْضِرُ … وَ…</a:t>
@@ -43358,6 +43628,7 @@
                   <a:srgbClr val="1B3B6F"/>
                 </a:solidFill>
                 <a:latin typeface="Amiri" pitchFamily="2" charset="-78"/>
+                <a:ea typeface="Amiri" pitchFamily="2" charset="-78"/>
                 <a:cs typeface="Amiri" pitchFamily="2" charset="-78"/>
               </a:rPr>
               <a:t>وَمَاذَا نَأْكُلُ؟</a:t>
@@ -43526,6 +43797,7 @@
                   <a:srgbClr val="1B3B6F"/>
                 </a:solidFill>
                 <a:latin typeface="Amiri" pitchFamily="2" charset="-78"/>
+                <a:ea typeface="Amiri" pitchFamily="2" charset="-78"/>
                 <a:cs typeface="Amiri" pitchFamily="2" charset="-78"/>
               </a:rPr>
               <a:t>إِذَا كَانَ … نَذْهَبُ إِلَى …</a:t>
@@ -43602,6 +43874,7 @@
                   <a:srgbClr val="1B3B6F"/>
                 </a:solidFill>
                 <a:latin typeface="Amiri" pitchFamily="2" charset="-78"/>
+                <a:ea typeface="Amiri" pitchFamily="2" charset="-78"/>
                 <a:cs typeface="Amiri" pitchFamily="2" charset="-78"/>
               </a:rPr>
               <a:t>وَإِذَا كَانَ الجَوُّ مُمْطِرًا؟</a:t>
@@ -43876,6 +44149,7 @@
                   <a:srgbClr val="D4AF37"/>
                 </a:solidFill>
                 <a:latin typeface="Amiri" pitchFamily="2" charset="-78"/>
+                <a:ea typeface="Amiri" pitchFamily="2" charset="-78"/>
                 <a:cs typeface="Amiri" pitchFamily="2" charset="-78"/>
               </a:rPr>
               <a:t>م</a:t>
@@ -44196,6 +44470,7 @@
                   <a:srgbClr val="8A6D1E"/>
                 </a:solidFill>
                 <a:latin typeface="Amiri" pitchFamily="2" charset="-78"/>
+                <a:ea typeface="Amiri" pitchFamily="2" charset="-78"/>
                 <a:cs typeface="Amiri" pitchFamily="2" charset="-78"/>
               </a:rPr>
               <a:t>فِي مَكْتَبِ السِّيَاحَةِ</a:t>
@@ -44476,6 +44751,7 @@
                   <a:srgbClr val="1B3B6F"/>
                 </a:solidFill>
                 <a:latin typeface="Amiri" pitchFamily="2" charset="-78"/>
+                <a:ea typeface="Amiri" pitchFamily="2" charset="-78"/>
                 <a:cs typeface="Amiri" pitchFamily="2" charset="-78"/>
               </a:rPr>
               <a:t>مَاذَا يُمْكِنُ أَنْ نَفْعَلَ فِي …؟</a:t>
@@ -44552,6 +44828,7 @@
                   <a:srgbClr val="1B3B6F"/>
                 </a:solidFill>
                 <a:latin typeface="Amiri" pitchFamily="2" charset="-78"/>
+                <a:ea typeface="Amiri" pitchFamily="2" charset="-78"/>
                 <a:cs typeface="Amiri" pitchFamily="2" charset="-78"/>
               </a:rPr>
               <a:t>مَرْحَبًا، كَيْفَ أُسَاعِدُكَ؟</a:t>
@@ -44720,6 +44997,7 @@
                   <a:srgbClr val="1B3B6F"/>
                 </a:solidFill>
                 <a:latin typeface="Amiri" pitchFamily="2" charset="-78"/>
+                <a:ea typeface="Amiri" pitchFamily="2" charset="-78"/>
                 <a:cs typeface="Amiri" pitchFamily="2" charset="-78"/>
               </a:rPr>
               <a:t>نُرِيدُ أَنْ نَزُورَ … لِأَنَّ …</a:t>
@@ -44796,6 +45074,7 @@
                   <a:srgbClr val="1B3B6F"/>
                 </a:solidFill>
                 <a:latin typeface="Amiri" pitchFamily="2" charset="-78"/>
+                <a:ea typeface="Amiri" pitchFamily="2" charset="-78"/>
                 <a:cs typeface="Amiri" pitchFamily="2" charset="-78"/>
               </a:rPr>
               <a:t>هُنَاكَ المُتْحَفُ وَالشَّاطِئُ وَالسُّوقُ القَدِيمُ.</a:t>
@@ -44964,6 +45243,7 @@
                   <a:srgbClr val="1B3B6F"/>
                 </a:solidFill>
                 <a:latin typeface="Amiri" pitchFamily="2" charset="-78"/>
+                <a:ea typeface="Amiri" pitchFamily="2" charset="-78"/>
                 <a:cs typeface="Amiri" pitchFamily="2" charset="-78"/>
               </a:rPr>
               <a:t>مَتَى …؟</a:t>
@@ -45040,6 +45320,7 @@
                   <a:srgbClr val="1B3B6F"/>
                 </a:solidFill>
                 <a:latin typeface="Amiri" pitchFamily="2" charset="-78"/>
+                <a:ea typeface="Amiri" pitchFamily="2" charset="-78"/>
                 <a:cs typeface="Amiri" pitchFamily="2" charset="-78"/>
               </a:rPr>
               <a:t>السُّوقُ يَفْتَحُ مِنَ التَّاسِعَةِ.</a:t>
@@ -45143,6 +45424,7 @@
                   <a:srgbClr val="1B3B6F"/>
                 </a:solidFill>
                 <a:latin typeface="Amiri" pitchFamily="2" charset="-78"/>
+                <a:ea typeface="Amiri" pitchFamily="2" charset="-78"/>
                 <a:cs typeface="Amiri" pitchFamily="2" charset="-78"/>
               </a:rPr>
               <a:t>كَيْفَ نَصِلُ إِلَى …؟</a:t>
@@ -45219,6 +45501,7 @@
                   <a:srgbClr val="1B3B6F"/>
                 </a:solidFill>
                 <a:latin typeface="Amiri" pitchFamily="2" charset="-78"/>
+                <a:ea typeface="Amiri" pitchFamily="2" charset="-78"/>
                 <a:cs typeface="Amiri" pitchFamily="2" charset="-78"/>
               </a:rPr>
               <a:t>فِي السَّادِسَةِ. وَهُنَاكَ مَطْعَمٌ مَشْهُورٌ قَرِيبٌ.</a:t>
@@ -45322,6 +45605,7 @@
                   <a:srgbClr val="1B3B6F"/>
                 </a:solidFill>
                 <a:latin typeface="Amiri" pitchFamily="2" charset="-78"/>
+                <a:ea typeface="Amiri" pitchFamily="2" charset="-78"/>
                 <a:cs typeface="Amiri" pitchFamily="2" charset="-78"/>
               </a:rPr>
               <a:t>سَنَبْقَى … حَتَّى …</a:t>
@@ -45398,6 +45682,7 @@
                   <a:srgbClr val="1B3B6F"/>
                 </a:solidFill>
                 <a:latin typeface="Amiri" pitchFamily="2" charset="-78"/>
+                <a:ea typeface="Amiri" pitchFamily="2" charset="-78"/>
                 <a:cs typeface="Amiri" pitchFamily="2" charset="-78"/>
               </a:rPr>
               <a:t>كَمْ يَوْمًا سَتَبْقَوْنَ فِي المَدِينَةِ؟</a:t>
@@ -45572,13 +45857,9 @@
     <a:fontScheme name="Office">
       <a:majorFont>
         <a:latin typeface="Calibri Light" panose="020F0302020204030204"/>
-        <a:ea typeface=""/>
-        <a:cs typeface=""/>
-        <a:font script="Jpan" typeface="游ゴシック Light"/>
-        <a:font script="Hang" typeface="맑은 고딕"/>
-        <a:font script="Hans" typeface="等线 Light"/>
-        <a:font script="Hant" typeface="新細明體"/>
-        <a:font script="Arab" typeface="Times New Roman"/>
+        <a:ea typeface="Amiri" pitchFamily="2" charset="-78"/>
+        <a:cs typeface="Amiri" pitchFamily="2" charset="-78"/>
+        <a:font script="Arab" typeface="Amiri"/>
         <a:font script="Hebr" typeface="Times New Roman"/>
         <a:font script="Thai" typeface="Angsana New"/>
         <a:font script="Ethi" typeface="Nyala"/>
@@ -45624,13 +45905,9 @@
       </a:majorFont>
       <a:minorFont>
         <a:latin typeface="Calibri" panose="020F0502020204030204"/>
-        <a:ea typeface=""/>
-        <a:cs typeface=""/>
-        <a:font script="Jpan" typeface="游ゴシック"/>
-        <a:font script="Hang" typeface="맑은 고딕"/>
-        <a:font script="Hans" typeface="等线"/>
-        <a:font script="Hant" typeface="新細明體"/>
-        <a:font script="Arab" typeface="Arial"/>
+        <a:ea typeface="Amiri" pitchFamily="2" charset="-78"/>
+        <a:cs typeface="Amiri" pitchFamily="2" charset="-78"/>
+        <a:font script="Arab" typeface="Amiri"/>
         <a:font script="Hebr" typeface="Arial"/>
         <a:font script="Thai" typeface="Cordia New"/>
         <a:font script="Ethi" typeface="Nyala"/>
